--- a/TCOFurnace/Files/TCOFurnace架构.pptx
+++ b/TCOFurnace/Files/TCOFurnace架构.pptx
@@ -107,7 +107,7 @@
   <p:extLst>
     <p:ext uri="{EFAFB233-063F-42B5-8137-9DF3F51BA10A}">
       <p15:sldGuideLst xmlns:p15="http://schemas.microsoft.com/office/powerpoint/2012/main">
-        <p15:guide id="1" orient="horz" pos="2109" userDrawn="1">
+        <p15:guide id="1" orient="horz" pos="2110" userDrawn="1">
           <p15:clr>
             <a:srgbClr val="A4A3A4"/>
           </p15:clr>
@@ -3068,9 +3068,9 @@
     <p:bg>
       <p:bgPr>
         <a:solidFill>
-          <a:schemeClr val="tx2">
-            <a:lumMod val="40000"/>
-            <a:lumOff val="60000"/>
+          <a:schemeClr val="accent1">
+            <a:lumMod val="20000"/>
+            <a:lumOff val="80000"/>
           </a:schemeClr>
         </a:solidFill>
         <a:effectLst/>
@@ -3105,11 +3105,13 @@
             <a:avLst/>
           </a:prstGeom>
           <a:solidFill>
-            <a:schemeClr val="accent1">
-              <a:lumMod val="60000"/>
-              <a:lumOff val="40000"/>
+            <a:schemeClr val="bg1">
+              <a:lumMod val="95000"/>
             </a:schemeClr>
           </a:solidFill>
+          <a:ln>
+            <a:noFill/>
+          </a:ln>
         </p:spPr>
         <p:style>
           <a:lnRef idx="2">
@@ -3150,8 +3152,14 @@
             <a:avLst/>
           </a:prstGeom>
           <a:solidFill>
-            <a:schemeClr val="accent1"/>
+            <a:schemeClr val="accent6">
+              <a:lumMod val="40000"/>
+              <a:lumOff val="60000"/>
+            </a:schemeClr>
           </a:solidFill>
+          <a:ln>
+            <a:noFill/>
+          </a:ln>
         </p:spPr>
         <p:txBody>
           <a:bodyPr wrap="square" rtlCol="0">
@@ -3164,7 +3172,6 @@
             </a:r>
             <a:r>
               <a:rPr lang="en-US" altLang="zh-CN" sz="2400">
-                <a:ln/>
                 <a:solidFill>
                   <a:schemeClr val="tx1"/>
                 </a:solidFill>
@@ -3180,7 +3187,6 @@
             </a:r>
             <a:r>
               <a:rPr lang="zh-CN" altLang="en-US" sz="2400">
-                <a:ln/>
                 <a:solidFill>
                   <a:schemeClr val="tx1"/>
                 </a:solidFill>
@@ -3195,7 +3201,6 @@
               <a:t>主程序</a:t>
             </a:r>
             <a:endParaRPr lang="zh-CN" altLang="en-US" sz="2400">
-              <a:ln/>
               <a:solidFill>
                 <a:schemeClr val="tx1"/>
               </a:solidFill>
@@ -3225,8 +3230,14 @@
             <a:avLst/>
           </a:prstGeom>
           <a:solidFill>
-            <a:schemeClr val="accent5"/>
+            <a:schemeClr val="accent5">
+              <a:lumMod val="40000"/>
+              <a:lumOff val="60000"/>
+            </a:schemeClr>
           </a:solidFill>
+          <a:ln>
+            <a:noFill/>
+          </a:ln>
         </p:spPr>
         <p:txBody>
           <a:bodyPr wrap="square" rtlCol="0">
@@ -3260,8 +3271,14 @@
             <a:avLst/>
           </a:prstGeom>
           <a:solidFill>
-            <a:schemeClr val="accent5"/>
+            <a:schemeClr val="accent5">
+              <a:lumMod val="40000"/>
+              <a:lumOff val="60000"/>
+            </a:schemeClr>
           </a:solidFill>
+          <a:ln>
+            <a:noFill/>
+          </a:ln>
         </p:spPr>
         <p:txBody>
           <a:bodyPr wrap="square" rtlCol="0">
@@ -3295,8 +3312,14 @@
             <a:avLst/>
           </a:prstGeom>
           <a:solidFill>
-            <a:schemeClr val="accent5"/>
+            <a:schemeClr val="accent5">
+              <a:lumMod val="40000"/>
+              <a:lumOff val="60000"/>
+            </a:schemeClr>
           </a:solidFill>
+          <a:ln>
+            <a:noFill/>
+          </a:ln>
         </p:spPr>
         <p:txBody>
           <a:bodyPr wrap="square" rtlCol="0">
@@ -3330,8 +3353,14 @@
             <a:avLst/>
           </a:prstGeom>
           <a:solidFill>
-            <a:schemeClr val="accent5"/>
+            <a:schemeClr val="accent5">
+              <a:lumMod val="40000"/>
+              <a:lumOff val="60000"/>
+            </a:schemeClr>
           </a:solidFill>
+          <a:ln>
+            <a:noFill/>
+          </a:ln>
         </p:spPr>
         <p:txBody>
           <a:bodyPr wrap="square" rtlCol="0">
@@ -3365,8 +3394,14 @@
             <a:avLst/>
           </a:prstGeom>
           <a:solidFill>
-            <a:schemeClr val="accent5"/>
+            <a:schemeClr val="accent5">
+              <a:lumMod val="40000"/>
+              <a:lumOff val="60000"/>
+            </a:schemeClr>
           </a:solidFill>
+          <a:ln>
+            <a:noFill/>
+          </a:ln>
         </p:spPr>
         <p:txBody>
           <a:bodyPr wrap="square" rtlCol="0">
@@ -3400,11 +3435,13 @@
             <a:avLst/>
           </a:prstGeom>
           <a:solidFill>
-            <a:schemeClr val="accent1">
-              <a:lumMod val="60000"/>
-              <a:lumOff val="40000"/>
+            <a:schemeClr val="bg1">
+              <a:lumMod val="95000"/>
             </a:schemeClr>
           </a:solidFill>
+          <a:ln>
+            <a:noFill/>
+          </a:ln>
         </p:spPr>
         <p:style>
           <a:lnRef idx="2">
@@ -3445,8 +3482,14 @@
             <a:avLst/>
           </a:prstGeom>
           <a:solidFill>
-            <a:schemeClr val="accent1"/>
+            <a:schemeClr val="accent6">
+              <a:lumMod val="40000"/>
+              <a:lumOff val="60000"/>
+            </a:schemeClr>
           </a:solidFill>
+          <a:ln>
+            <a:noFill/>
+          </a:ln>
         </p:spPr>
         <p:txBody>
           <a:bodyPr wrap="square" rtlCol="0">
@@ -3484,8 +3527,14 @@
             <a:avLst/>
           </a:prstGeom>
           <a:solidFill>
-            <a:schemeClr val="accent5"/>
+            <a:schemeClr val="accent5">
+              <a:lumMod val="40000"/>
+              <a:lumOff val="60000"/>
+            </a:schemeClr>
           </a:solidFill>
+          <a:ln>
+            <a:noFill/>
+          </a:ln>
         </p:spPr>
         <p:txBody>
           <a:bodyPr wrap="square" rtlCol="0">
@@ -3515,8 +3564,14 @@
             <a:avLst/>
           </a:prstGeom>
           <a:solidFill>
-            <a:schemeClr val="accent5"/>
+            <a:schemeClr val="accent5">
+              <a:lumMod val="40000"/>
+              <a:lumOff val="60000"/>
+            </a:schemeClr>
           </a:solidFill>
+          <a:ln>
+            <a:noFill/>
+          </a:ln>
         </p:spPr>
         <p:txBody>
           <a:bodyPr wrap="square" rtlCol="0">
@@ -3546,8 +3601,14 @@
             <a:avLst/>
           </a:prstGeom>
           <a:solidFill>
-            <a:schemeClr val="accent5"/>
+            <a:schemeClr val="accent5">
+              <a:lumMod val="40000"/>
+              <a:lumOff val="60000"/>
+            </a:schemeClr>
           </a:solidFill>
+          <a:ln>
+            <a:noFill/>
+          </a:ln>
         </p:spPr>
         <p:txBody>
           <a:bodyPr wrap="square" rtlCol="0">
@@ -3577,11 +3638,13 @@
             <a:avLst/>
           </a:prstGeom>
           <a:solidFill>
-            <a:schemeClr val="accent1">
-              <a:lumMod val="60000"/>
-              <a:lumOff val="40000"/>
+            <a:schemeClr val="bg1">
+              <a:lumMod val="95000"/>
             </a:schemeClr>
           </a:solidFill>
+          <a:ln>
+            <a:noFill/>
+          </a:ln>
         </p:spPr>
         <p:style>
           <a:lnRef idx="2">
@@ -3622,8 +3685,14 @@
             <a:avLst/>
           </a:prstGeom>
           <a:solidFill>
-            <a:schemeClr val="accent1"/>
+            <a:schemeClr val="accent6">
+              <a:lumMod val="40000"/>
+              <a:lumOff val="60000"/>
+            </a:schemeClr>
           </a:solidFill>
+          <a:ln>
+            <a:noFill/>
+          </a:ln>
         </p:spPr>
         <p:txBody>
           <a:bodyPr wrap="square" rtlCol="0">
@@ -3661,8 +3730,14 @@
             <a:avLst/>
           </a:prstGeom>
           <a:solidFill>
-            <a:schemeClr val="accent5"/>
+            <a:schemeClr val="accent5">
+              <a:lumMod val="40000"/>
+              <a:lumOff val="60000"/>
+            </a:schemeClr>
           </a:solidFill>
+          <a:ln>
+            <a:noFill/>
+          </a:ln>
         </p:spPr>
         <p:txBody>
           <a:bodyPr wrap="square" rtlCol="0">
@@ -3696,8 +3771,14 @@
             <a:avLst/>
           </a:prstGeom>
           <a:solidFill>
-            <a:schemeClr val="accent5"/>
+            <a:schemeClr val="accent5">
+              <a:lumMod val="40000"/>
+              <a:lumOff val="60000"/>
+            </a:schemeClr>
           </a:solidFill>
+          <a:ln>
+            <a:noFill/>
+          </a:ln>
         </p:spPr>
         <p:txBody>
           <a:bodyPr wrap="square" rtlCol="0">
@@ -3731,11 +3812,13 @@
             <a:avLst/>
           </a:prstGeom>
           <a:solidFill>
-            <a:schemeClr val="accent1">
-              <a:lumMod val="60000"/>
-              <a:lumOff val="40000"/>
+            <a:schemeClr val="bg1">
+              <a:lumMod val="95000"/>
             </a:schemeClr>
           </a:solidFill>
+          <a:ln>
+            <a:noFill/>
+          </a:ln>
         </p:spPr>
         <p:style>
           <a:lnRef idx="2">
@@ -3776,8 +3859,14 @@
             <a:avLst/>
           </a:prstGeom>
           <a:solidFill>
-            <a:schemeClr val="accent5"/>
+            <a:schemeClr val="accent5">
+              <a:lumMod val="40000"/>
+              <a:lumOff val="60000"/>
+            </a:schemeClr>
           </a:solidFill>
+          <a:ln>
+            <a:noFill/>
+          </a:ln>
         </p:spPr>
         <p:txBody>
           <a:bodyPr wrap="square" rtlCol="0">
@@ -3811,8 +3900,14 @@
             <a:avLst/>
           </a:prstGeom>
           <a:solidFill>
-            <a:schemeClr val="accent5"/>
+            <a:schemeClr val="accent5">
+              <a:lumMod val="40000"/>
+              <a:lumOff val="60000"/>
+            </a:schemeClr>
           </a:solidFill>
+          <a:ln>
+            <a:noFill/>
+          </a:ln>
         </p:spPr>
         <p:txBody>
           <a:bodyPr wrap="square" rtlCol="0">
@@ -3846,8 +3941,14 @@
             <a:avLst/>
           </a:prstGeom>
           <a:solidFill>
-            <a:schemeClr val="accent5"/>
+            <a:schemeClr val="accent5">
+              <a:lumMod val="40000"/>
+              <a:lumOff val="60000"/>
+            </a:schemeClr>
           </a:solidFill>
+          <a:ln>
+            <a:noFill/>
+          </a:ln>
         </p:spPr>
         <p:txBody>
           <a:bodyPr wrap="square" rtlCol="0">
@@ -3881,11 +3982,13 @@
             <a:avLst/>
           </a:prstGeom>
           <a:solidFill>
-            <a:schemeClr val="accent1">
-              <a:lumMod val="60000"/>
-              <a:lumOff val="40000"/>
+            <a:schemeClr val="bg1">
+              <a:lumMod val="95000"/>
             </a:schemeClr>
           </a:solidFill>
+          <a:ln>
+            <a:noFill/>
+          </a:ln>
         </p:spPr>
         <p:style>
           <a:lnRef idx="2">
@@ -3926,8 +4029,14 @@
             <a:avLst/>
           </a:prstGeom>
           <a:solidFill>
-            <a:schemeClr val="accent1"/>
+            <a:schemeClr val="accent6">
+              <a:lumMod val="40000"/>
+              <a:lumOff val="60000"/>
+            </a:schemeClr>
           </a:solidFill>
+          <a:ln>
+            <a:noFill/>
+          </a:ln>
         </p:spPr>
         <p:txBody>
           <a:bodyPr wrap="square" rtlCol="0">
@@ -3973,8 +4082,14 @@
             <a:avLst/>
           </a:prstGeom>
           <a:solidFill>
-            <a:schemeClr val="accent1"/>
+            <a:schemeClr val="accent6">
+              <a:lumMod val="40000"/>
+              <a:lumOff val="60000"/>
+            </a:schemeClr>
           </a:solidFill>
+          <a:ln>
+            <a:noFill/>
+          </a:ln>
         </p:spPr>
         <p:txBody>
           <a:bodyPr wrap="square" rtlCol="0">
@@ -4046,11 +4161,14 @@
             <a:avLst/>
           </a:prstGeom>
           <a:solidFill>
-            <a:schemeClr val="accent5">
-              <a:lumMod val="40000"/>
-              <a:lumOff val="60000"/>
+            <a:schemeClr val="accent4">
+              <a:lumMod val="60000"/>
+              <a:lumOff val="40000"/>
             </a:schemeClr>
           </a:solidFill>
+          <a:ln>
+            <a:noFill/>
+          </a:ln>
         </p:spPr>
         <p:style>
           <a:lnRef idx="2">
@@ -4091,8 +4209,14 @@
             <a:avLst/>
           </a:prstGeom>
           <a:solidFill>
-            <a:schemeClr val="accent5"/>
+            <a:schemeClr val="accent5">
+              <a:lumMod val="40000"/>
+              <a:lumOff val="60000"/>
+            </a:schemeClr>
           </a:solidFill>
+          <a:ln>
+            <a:noFill/>
+          </a:ln>
         </p:spPr>
         <p:txBody>
           <a:bodyPr wrap="square" rtlCol="0">
@@ -4126,8 +4250,14 @@
             <a:avLst/>
           </a:prstGeom>
           <a:solidFill>
-            <a:schemeClr val="accent5"/>
+            <a:schemeClr val="accent5">
+              <a:lumMod val="40000"/>
+              <a:lumOff val="60000"/>
+            </a:schemeClr>
           </a:solidFill>
+          <a:ln>
+            <a:noFill/>
+          </a:ln>
         </p:spPr>
         <p:txBody>
           <a:bodyPr wrap="square" rtlCol="0">
@@ -4161,8 +4291,14 @@
             <a:avLst/>
           </a:prstGeom>
           <a:solidFill>
-            <a:schemeClr val="accent5"/>
+            <a:schemeClr val="accent5">
+              <a:lumMod val="40000"/>
+              <a:lumOff val="60000"/>
+            </a:schemeClr>
           </a:solidFill>
+          <a:ln>
+            <a:noFill/>
+          </a:ln>
         </p:spPr>
         <p:txBody>
           <a:bodyPr wrap="square" rtlCol="0">
@@ -4189,12 +4325,21 @@
         </p:nvSpPr>
         <p:spPr>
           <a:xfrm>
-            <a:off x="1862455" y="1783715"/>
-            <a:ext cx="76200" cy="733425"/>
+            <a:off x="1862455" y="1766570"/>
+            <a:ext cx="149860" cy="750570"/>
           </a:xfrm>
           <a:prstGeom prst="downArrow">
             <a:avLst/>
           </a:prstGeom>
+          <a:solidFill>
+            <a:schemeClr val="accent2">
+              <a:lumMod val="40000"/>
+              <a:lumOff val="60000"/>
+            </a:schemeClr>
+          </a:solidFill>
+          <a:ln>
+            <a:noFill/>
+          </a:ln>
         </p:spPr>
         <p:style>
           <a:lnRef idx="2">
@@ -4222,18 +4367,27 @@
       </p:sp>
       <p:sp>
         <p:nvSpPr>
-          <p:cNvPr id="45" name="下箭头 44"/>
+          <p:cNvPr id="46" name="下箭头 45"/>
           <p:cNvSpPr/>
           <p:nvPr/>
         </p:nvSpPr>
         <p:spPr>
-          <a:xfrm>
-            <a:off x="10489565" y="1852295"/>
-            <a:ext cx="123825" cy="665480"/>
+          <a:xfrm rot="16200000">
+            <a:off x="5151755" y="3130550"/>
+            <a:ext cx="200025" cy="716915"/>
           </a:xfrm>
           <a:prstGeom prst="downArrow">
             <a:avLst/>
           </a:prstGeom>
+          <a:solidFill>
+            <a:schemeClr val="accent2">
+              <a:lumMod val="40000"/>
+              <a:lumOff val="60000"/>
+            </a:schemeClr>
+          </a:solidFill>
+          <a:ln>
+            <a:noFill/>
+          </a:ln>
         </p:spPr>
         <p:style>
           <a:lnRef idx="2">
@@ -4261,18 +4415,27 @@
       </p:sp>
       <p:sp>
         <p:nvSpPr>
-          <p:cNvPr id="46" name="下箭头 45"/>
+          <p:cNvPr id="52" name="下箭头 51"/>
           <p:cNvSpPr/>
           <p:nvPr/>
         </p:nvSpPr>
         <p:spPr>
-          <a:xfrm rot="16200000">
-            <a:off x="5193665" y="3088640"/>
-            <a:ext cx="132715" cy="733425"/>
+          <a:xfrm>
+            <a:off x="7034530" y="1959610"/>
+            <a:ext cx="283845" cy="561340"/>
           </a:xfrm>
           <a:prstGeom prst="downArrow">
             <a:avLst/>
           </a:prstGeom>
+          <a:solidFill>
+            <a:schemeClr val="accent2">
+              <a:lumMod val="40000"/>
+              <a:lumOff val="60000"/>
+            </a:schemeClr>
+          </a:solidFill>
+          <a:ln>
+            <a:noFill/>
+          </a:ln>
         </p:spPr>
         <p:style>
           <a:lnRef idx="2">
@@ -4300,18 +4463,30 @@
       </p:sp>
       <p:sp>
         <p:nvSpPr>
-          <p:cNvPr id="50" name="下箭头 49"/>
+          <p:cNvPr id="55" name="下箭头 54"/>
           <p:cNvSpPr/>
           <p:nvPr/>
         </p:nvSpPr>
         <p:spPr>
-          <a:xfrm>
-            <a:off x="4490085" y="1784350"/>
-            <a:ext cx="76200" cy="733425"/>
+          <a:xfrm rot="5400000">
+            <a:off x="8921750" y="4085590"/>
+            <a:ext cx="153035" cy="808355"/>
           </a:xfrm>
           <a:prstGeom prst="downArrow">
-            <a:avLst/>
+            <a:avLst>
+              <a:gd name="adj1" fmla="val 50239"/>
+              <a:gd name="adj2" fmla="val 50000"/>
+            </a:avLst>
           </a:prstGeom>
+          <a:solidFill>
+            <a:schemeClr val="accent2">
+              <a:lumMod val="40000"/>
+              <a:lumOff val="60000"/>
+            </a:schemeClr>
+          </a:solidFill>
+          <a:ln>
+            <a:noFill/>
+          </a:ln>
         </p:spPr>
         <p:style>
           <a:lnRef idx="2">
@@ -4339,18 +4514,27 @@
       </p:sp>
       <p:sp>
         <p:nvSpPr>
-          <p:cNvPr id="51" name="下箭头 50"/>
+          <p:cNvPr id="56" name="下箭头 55"/>
           <p:cNvSpPr/>
           <p:nvPr/>
         </p:nvSpPr>
         <p:spPr>
           <a:xfrm>
-            <a:off x="3211195" y="1784350"/>
-            <a:ext cx="76200" cy="733425"/>
+            <a:off x="2582545" y="4013200"/>
+            <a:ext cx="160020" cy="537845"/>
           </a:xfrm>
           <a:prstGeom prst="downArrow">
             <a:avLst/>
           </a:prstGeom>
+          <a:solidFill>
+            <a:schemeClr val="accent2">
+              <a:lumMod val="40000"/>
+              <a:lumOff val="60000"/>
+            </a:schemeClr>
+          </a:solidFill>
+          <a:ln>
+            <a:noFill/>
+          </a:ln>
         </p:spPr>
         <p:style>
           <a:lnRef idx="2">
@@ -4378,18 +4562,27 @@
       </p:sp>
       <p:sp>
         <p:nvSpPr>
-          <p:cNvPr id="52" name="下箭头 51"/>
+          <p:cNvPr id="57" name="下箭头 56"/>
           <p:cNvSpPr/>
           <p:nvPr/>
         </p:nvSpPr>
         <p:spPr>
-          <a:xfrm>
-            <a:off x="7034530" y="1959610"/>
-            <a:ext cx="218440" cy="561340"/>
+          <a:xfrm rot="16200000">
+            <a:off x="5166360" y="4879975"/>
+            <a:ext cx="170180" cy="733425"/>
           </a:xfrm>
           <a:prstGeom prst="downArrow">
             <a:avLst/>
           </a:prstGeom>
+          <a:solidFill>
+            <a:schemeClr val="accent2">
+              <a:lumMod val="40000"/>
+              <a:lumOff val="60000"/>
+            </a:schemeClr>
+          </a:solidFill>
+          <a:ln>
+            <a:noFill/>
+          </a:ln>
         </p:spPr>
         <p:style>
           <a:lnRef idx="2">
@@ -4417,21 +4610,27 @@
       </p:sp>
       <p:sp>
         <p:nvSpPr>
-          <p:cNvPr id="55" name="下箭头 54"/>
+          <p:cNvPr id="2" name="下箭头 1"/>
           <p:cNvSpPr/>
           <p:nvPr/>
         </p:nvSpPr>
         <p:spPr>
-          <a:xfrm rot="5400000">
-            <a:off x="8929370" y="3198495"/>
-            <a:ext cx="132715" cy="768350"/>
+          <a:xfrm>
+            <a:off x="3310255" y="1781810"/>
+            <a:ext cx="149860" cy="750570"/>
           </a:xfrm>
           <a:prstGeom prst="downArrow">
-            <a:avLst>
-              <a:gd name="adj1" fmla="val 50239"/>
-              <a:gd name="adj2" fmla="val 50000"/>
-            </a:avLst>
+            <a:avLst/>
           </a:prstGeom>
+          <a:solidFill>
+            <a:schemeClr val="accent2">
+              <a:lumMod val="40000"/>
+              <a:lumOff val="60000"/>
+            </a:schemeClr>
+          </a:solidFill>
+          <a:ln>
+            <a:noFill/>
+          </a:ln>
         </p:spPr>
         <p:style>
           <a:lnRef idx="2">
@@ -4459,18 +4658,27 @@
       </p:sp>
       <p:sp>
         <p:nvSpPr>
-          <p:cNvPr id="56" name="下箭头 55"/>
+          <p:cNvPr id="3" name="下箭头 2"/>
           <p:cNvSpPr/>
           <p:nvPr/>
         </p:nvSpPr>
         <p:spPr>
           <a:xfrm>
-            <a:off x="2582545" y="4004310"/>
-            <a:ext cx="158750" cy="561340"/>
+            <a:off x="4492625" y="1781810"/>
+            <a:ext cx="149860" cy="750570"/>
           </a:xfrm>
           <a:prstGeom prst="downArrow">
             <a:avLst/>
           </a:prstGeom>
+          <a:solidFill>
+            <a:schemeClr val="accent2">
+              <a:lumMod val="40000"/>
+              <a:lumOff val="60000"/>
+            </a:schemeClr>
+          </a:solidFill>
+          <a:ln>
+            <a:noFill/>
+          </a:ln>
         </p:spPr>
         <p:style>
           <a:lnRef idx="2">
@@ -4498,18 +4706,27 @@
       </p:sp>
       <p:sp>
         <p:nvSpPr>
-          <p:cNvPr id="57" name="下箭头 56"/>
+          <p:cNvPr id="19" name="下箭头 18"/>
           <p:cNvSpPr/>
           <p:nvPr/>
         </p:nvSpPr>
         <p:spPr>
-          <a:xfrm rot="16200000">
-            <a:off x="5184775" y="4898390"/>
-            <a:ext cx="132715" cy="733425"/>
+          <a:xfrm>
+            <a:off x="10405745" y="1852295"/>
+            <a:ext cx="140335" cy="680085"/>
           </a:xfrm>
           <a:prstGeom prst="downArrow">
             <a:avLst/>
           </a:prstGeom>
+          <a:solidFill>
+            <a:schemeClr val="accent2">
+              <a:lumMod val="40000"/>
+              <a:lumOff val="60000"/>
+            </a:schemeClr>
+          </a:solidFill>
+          <a:ln>
+            <a:noFill/>
+          </a:ln>
         </p:spPr>
         <p:style>
           <a:lnRef idx="2">

--- a/TCOFurnace/Files/TCOFurnace架构.pptx
+++ b/TCOFurnace/Files/TCOFurnace架构.pptx
@@ -6,6 +6,9 @@
   </p:sldMasterIdLst>
   <p:sldIdLst>
     <p:sldId id="256" r:id="rId3"/>
+    <p:sldId id="257" r:id="rId4"/>
+    <p:sldId id="258" r:id="rId5"/>
+    <p:sldId id="259" r:id="rId6"/>
   </p:sldIdLst>
   <p:sldSz cx="12192000" cy="6858000"/>
   <p:notesSz cx="6858000" cy="9144000"/>
@@ -107,12 +110,12 @@
   <p:extLst>
     <p:ext uri="{EFAFB233-063F-42B5-8137-9DF3F51BA10A}">
       <p15:sldGuideLst xmlns:p15="http://schemas.microsoft.com/office/powerpoint/2012/main">
-        <p15:guide id="1" orient="horz" pos="2110" userDrawn="1">
+        <p15:guide id="1" orient="horz" pos="2230" userDrawn="1">
           <p15:clr>
             <a:srgbClr val="A4A3A4"/>
           </p15:clr>
         </p15:guide>
-        <p15:guide id="2" pos="3838" userDrawn="1">
+        <p15:guide id="2" pos="3890" userDrawn="1">
           <p15:clr>
             <a:srgbClr val="A4A3A4"/>
           </p15:clr>
@@ -4727,6 +4730,3051 @@
           <a:ln>
             <a:noFill/>
           </a:ln>
+        </p:spPr>
+        <p:style>
+          <a:lnRef idx="2">
+            <a:schemeClr val="accent1">
+              <a:lumMod val="75000"/>
+            </a:schemeClr>
+          </a:lnRef>
+          <a:fillRef idx="1">
+            <a:schemeClr val="accent1"/>
+          </a:fillRef>
+          <a:effectRef idx="0">
+            <a:srgbClr val="FFFFFF"/>
+          </a:effectRef>
+          <a:fontRef idx="minor">
+            <a:schemeClr val="lt1"/>
+          </a:fontRef>
+        </p:style>
+        <p:txBody>
+          <a:bodyPr rtlCol="0" anchor="ctr"/>
+          <a:p>
+            <a:pPr algn="ctr"/>
+            <a:endParaRPr lang="zh-CN" altLang="en-US"/>
+          </a:p>
+        </p:txBody>
+      </p:sp>
+    </p:spTree>
+    <p:custDataLst>
+      <p:tags r:id="rId1"/>
+    </p:custDataLst>
+  </p:cSld>
+  <p:clrMapOvr>
+    <a:masterClrMapping/>
+  </p:clrMapOvr>
+</p:sld>
+</file>
+
+<file path=ppt/slides/slide2.xml><?xml version="1.0" encoding="utf-8"?>
+<p:sld xmlns:a="http://schemas.openxmlformats.org/drawingml/2006/main" xmlns:r="http://schemas.openxmlformats.org/officeDocument/2006/relationships" xmlns:p="http://schemas.openxmlformats.org/presentationml/2006/main">
+  <p:cSld>
+    <p:bg>
+      <p:bgPr>
+        <a:solidFill>
+          <a:schemeClr val="accent1">
+            <a:lumMod val="20000"/>
+            <a:lumOff val="80000"/>
+          </a:schemeClr>
+        </a:solidFill>
+        <a:effectLst/>
+      </p:bgPr>
+    </p:bg>
+    <p:spTree>
+      <p:nvGrpSpPr>
+        <p:cNvPr id="1" name=""/>
+        <p:cNvGrpSpPr/>
+        <p:nvPr/>
+      </p:nvGrpSpPr>
+      <p:grpSpPr/>
+      <p:sp>
+        <p:nvSpPr>
+          <p:cNvPr id="4" name="矩形 3"/>
+          <p:cNvSpPr/>
+          <p:nvPr/>
+        </p:nvSpPr>
+        <p:spPr>
+          <a:xfrm>
+            <a:off x="4194810" y="3023870"/>
+            <a:ext cx="3542665" cy="3627755"/>
+          </a:xfrm>
+          <a:prstGeom prst="rect">
+            <a:avLst/>
+          </a:prstGeom>
+          <a:solidFill>
+            <a:schemeClr val="accent1">
+              <a:lumMod val="60000"/>
+              <a:lumOff val="40000"/>
+            </a:schemeClr>
+          </a:solidFill>
+          <a:ln>
+            <a:noFill/>
+          </a:ln>
+        </p:spPr>
+        <p:style>
+          <a:lnRef idx="2">
+            <a:schemeClr val="accent1">
+              <a:lumMod val="75000"/>
+            </a:schemeClr>
+          </a:lnRef>
+          <a:fillRef idx="1">
+            <a:schemeClr val="accent1"/>
+          </a:fillRef>
+          <a:effectRef idx="0">
+            <a:srgbClr val="FFFFFF"/>
+          </a:effectRef>
+          <a:fontRef idx="minor">
+            <a:schemeClr val="lt1"/>
+          </a:fontRef>
+        </p:style>
+        <p:txBody>
+          <a:bodyPr rtlCol="0" anchor="ctr"/>
+          <a:p>
+            <a:pPr algn="ctr"/>
+            <a:endParaRPr lang="zh-CN" altLang="en-US"/>
+          </a:p>
+        </p:txBody>
+      </p:sp>
+      <p:sp>
+        <p:nvSpPr>
+          <p:cNvPr id="5" name="文本框 4"/>
+          <p:cNvSpPr txBox="1"/>
+          <p:nvPr/>
+        </p:nvSpPr>
+        <p:spPr>
+          <a:xfrm>
+            <a:off x="5011420" y="3096260"/>
+            <a:ext cx="2035175" cy="632460"/>
+          </a:xfrm>
+          <a:prstGeom prst="rect">
+            <a:avLst/>
+          </a:prstGeom>
+          <a:solidFill>
+            <a:schemeClr val="accent6">
+              <a:lumMod val="40000"/>
+              <a:lumOff val="60000"/>
+            </a:schemeClr>
+          </a:solidFill>
+          <a:ln>
+            <a:noFill/>
+          </a:ln>
+        </p:spPr>
+        <p:txBody>
+          <a:bodyPr wrap="square" rtlCol="0">
+            <a:noAutofit/>
+          </a:bodyPr>
+          <a:p>
+            <a:r>
+              <a:rPr lang="en-US" altLang="zh-CN"/>
+              <a:t>   </a:t>
+            </a:r>
+            <a:r>
+              <a:rPr lang="zh-CN" altLang="en-US"/>
+              <a:t>温度控制</a:t>
+            </a:r>
+            <a:r>
+              <a:rPr lang="zh-CN" altLang="en-US"/>
+              <a:t>算法</a:t>
+            </a:r>
+            <a:endParaRPr lang="zh-CN" altLang="en-US"/>
+          </a:p>
+          <a:p>
+            <a:r>
+              <a:rPr lang="en-US" altLang="zh-CN" sz="1200"/>
+              <a:t>   TemperatureControlle</a:t>
+            </a:r>
+            <a:r>
+              <a:rPr lang="en-US" altLang="zh-CN" sz="1200"/>
+              <a:t>r</a:t>
+            </a:r>
+            <a:endParaRPr lang="en-US" altLang="zh-CN" sz="1200"/>
+          </a:p>
+        </p:txBody>
+      </p:sp>
+      <p:sp>
+        <p:nvSpPr>
+          <p:cNvPr id="6" name="文本框 5"/>
+          <p:cNvSpPr txBox="1"/>
+          <p:nvPr/>
+        </p:nvSpPr>
+        <p:spPr>
+          <a:xfrm>
+            <a:off x="4354195" y="3825240"/>
+            <a:ext cx="3226435" cy="444500"/>
+          </a:xfrm>
+          <a:prstGeom prst="rect">
+            <a:avLst/>
+          </a:prstGeom>
+          <a:solidFill>
+            <a:schemeClr val="accent5">
+              <a:lumMod val="40000"/>
+              <a:lumOff val="60000"/>
+            </a:schemeClr>
+          </a:solidFill>
+          <a:ln>
+            <a:noFill/>
+          </a:ln>
+        </p:spPr>
+        <p:txBody>
+          <a:bodyPr wrap="square" rtlCol="0">
+            <a:noAutofit/>
+          </a:bodyPr>
+          <a:p>
+            <a:r>
+              <a:rPr lang="en-US" altLang="zh-CN" sz="1000"/>
+              <a:t>SetPara(targetTemp, minPower, maxPower)</a:t>
+            </a:r>
+            <a:endParaRPr lang="en-US" altLang="zh-CN" sz="1000"/>
+          </a:p>
+          <a:p>
+            <a:r>
+              <a:rPr lang="zh-CN" altLang="en-US" sz="1000"/>
+              <a:t>设置目标温度</a:t>
+            </a:r>
+            <a:r>
+              <a:rPr lang="en-US" altLang="zh-CN" sz="1000"/>
+              <a:t>,</a:t>
+            </a:r>
+            <a:r>
+              <a:rPr lang="zh-CN" altLang="en-US" sz="1000"/>
+              <a:t>最大功率</a:t>
+            </a:r>
+            <a:r>
+              <a:rPr lang="en-US" altLang="zh-CN" sz="1000"/>
+              <a:t>,</a:t>
+            </a:r>
+            <a:r>
+              <a:rPr lang="zh-CN" altLang="en-US" sz="1000"/>
+              <a:t>最小</a:t>
+            </a:r>
+            <a:r>
+              <a:rPr lang="zh-CN" altLang="en-US" sz="1000"/>
+              <a:t>功率</a:t>
+            </a:r>
+            <a:endParaRPr lang="zh-CN" altLang="en-US" sz="1000"/>
+          </a:p>
+        </p:txBody>
+      </p:sp>
+      <p:sp>
+        <p:nvSpPr>
+          <p:cNvPr id="15" name="矩形 14"/>
+          <p:cNvSpPr/>
+          <p:nvPr/>
+        </p:nvSpPr>
+        <p:spPr>
+          <a:xfrm>
+            <a:off x="9326245" y="3604895"/>
+            <a:ext cx="2491105" cy="1466850"/>
+          </a:xfrm>
+          <a:prstGeom prst="rect">
+            <a:avLst/>
+          </a:prstGeom>
+          <a:solidFill>
+            <a:schemeClr val="bg1">
+              <a:lumMod val="95000"/>
+            </a:schemeClr>
+          </a:solidFill>
+          <a:ln>
+            <a:noFill/>
+          </a:ln>
+        </p:spPr>
+        <p:style>
+          <a:lnRef idx="2">
+            <a:schemeClr val="accent1">
+              <a:lumMod val="75000"/>
+            </a:schemeClr>
+          </a:lnRef>
+          <a:fillRef idx="1">
+            <a:schemeClr val="accent1"/>
+          </a:fillRef>
+          <a:effectRef idx="0">
+            <a:srgbClr val="FFFFFF"/>
+          </a:effectRef>
+          <a:fontRef idx="minor">
+            <a:schemeClr val="lt1"/>
+          </a:fontRef>
+        </p:style>
+        <p:txBody>
+          <a:bodyPr rtlCol="0" anchor="ctr"/>
+          <a:p>
+            <a:pPr algn="ctr"/>
+            <a:endParaRPr lang="zh-CN" altLang="en-US"/>
+          </a:p>
+        </p:txBody>
+      </p:sp>
+      <p:sp>
+        <p:nvSpPr>
+          <p:cNvPr id="16" name="文本框 15"/>
+          <p:cNvSpPr txBox="1"/>
+          <p:nvPr/>
+        </p:nvSpPr>
+        <p:spPr>
+          <a:xfrm>
+            <a:off x="9624060" y="3728720"/>
+            <a:ext cx="1836420" cy="582930"/>
+          </a:xfrm>
+          <a:prstGeom prst="rect">
+            <a:avLst/>
+          </a:prstGeom>
+          <a:solidFill>
+            <a:schemeClr val="accent6">
+              <a:lumMod val="40000"/>
+              <a:lumOff val="60000"/>
+            </a:schemeClr>
+          </a:solidFill>
+          <a:ln>
+            <a:noFill/>
+          </a:ln>
+        </p:spPr>
+        <p:txBody>
+          <a:bodyPr wrap="square" rtlCol="0">
+            <a:noAutofit/>
+          </a:bodyPr>
+          <a:p>
+            <a:r>
+              <a:rPr lang="zh-CN" altLang="en-US"/>
+              <a:t>模拟量控制</a:t>
+            </a:r>
+            <a:r>
+              <a:rPr lang="zh-CN" altLang="en-US"/>
+              <a:t>模块</a:t>
+            </a:r>
+            <a:endParaRPr lang="zh-CN" altLang="en-US"/>
+          </a:p>
+          <a:p>
+            <a:r>
+              <a:rPr lang="en-US" altLang="zh-CN" sz="1200">
+                <a:sym typeface="+mn-ea"/>
+              </a:rPr>
+              <a:t>      JY-AMDAIAO </a:t>
+            </a:r>
+            <a:endParaRPr lang="en-US" altLang="zh-CN" sz="1200">
+              <a:sym typeface="+mn-ea"/>
+            </a:endParaRPr>
+          </a:p>
+        </p:txBody>
+      </p:sp>
+      <p:sp>
+        <p:nvSpPr>
+          <p:cNvPr id="19" name="矩形 18"/>
+          <p:cNvSpPr/>
+          <p:nvPr/>
+        </p:nvSpPr>
+        <p:spPr>
+          <a:xfrm>
+            <a:off x="8391525" y="521335"/>
+            <a:ext cx="3472815" cy="1466850"/>
+          </a:xfrm>
+          <a:prstGeom prst="rect">
+            <a:avLst/>
+          </a:prstGeom>
+          <a:solidFill>
+            <a:schemeClr val="bg1">
+              <a:lumMod val="95000"/>
+            </a:schemeClr>
+          </a:solidFill>
+          <a:ln>
+            <a:noFill/>
+          </a:ln>
+        </p:spPr>
+        <p:style>
+          <a:lnRef idx="2">
+            <a:schemeClr val="accent1">
+              <a:lumMod val="75000"/>
+            </a:schemeClr>
+          </a:lnRef>
+          <a:fillRef idx="1">
+            <a:schemeClr val="accent1"/>
+          </a:fillRef>
+          <a:effectRef idx="0">
+            <a:srgbClr val="FFFFFF"/>
+          </a:effectRef>
+          <a:fontRef idx="minor">
+            <a:schemeClr val="lt1"/>
+          </a:fontRef>
+        </p:style>
+        <p:txBody>
+          <a:bodyPr rtlCol="0" anchor="ctr"/>
+          <a:p>
+            <a:pPr algn="ctr"/>
+            <a:endParaRPr lang="zh-CN" altLang="en-US"/>
+          </a:p>
+        </p:txBody>
+      </p:sp>
+      <p:sp>
+        <p:nvSpPr>
+          <p:cNvPr id="20" name="文本框 19"/>
+          <p:cNvSpPr txBox="1"/>
+          <p:nvPr/>
+        </p:nvSpPr>
+        <p:spPr>
+          <a:xfrm>
+            <a:off x="9138285" y="645795"/>
+            <a:ext cx="2121535" cy="622300"/>
+          </a:xfrm>
+          <a:prstGeom prst="rect">
+            <a:avLst/>
+          </a:prstGeom>
+          <a:solidFill>
+            <a:schemeClr val="accent6">
+              <a:lumMod val="40000"/>
+              <a:lumOff val="60000"/>
+            </a:schemeClr>
+          </a:solidFill>
+          <a:ln>
+            <a:noFill/>
+          </a:ln>
+        </p:spPr>
+        <p:txBody>
+          <a:bodyPr wrap="square" rtlCol="0">
+            <a:noAutofit/>
+          </a:bodyPr>
+          <a:p>
+            <a:r>
+              <a:rPr lang="en-US" altLang="zh-CN"/>
+              <a:t>         </a:t>
+            </a:r>
+            <a:r>
+              <a:rPr lang="zh-CN" altLang="en-US"/>
+              <a:t>调压</a:t>
+            </a:r>
+            <a:r>
+              <a:rPr lang="zh-CN" altLang="en-US"/>
+              <a:t>模块</a:t>
+            </a:r>
+            <a:endParaRPr lang="zh-CN" altLang="en-US"/>
+          </a:p>
+          <a:p>
+            <a:r>
+              <a:rPr lang="en-US" altLang="zh-CN">
+                <a:sym typeface="+mn-ea"/>
+              </a:rPr>
+              <a:t>       </a:t>
+            </a:r>
+            <a:r>
+              <a:rPr lang="en-US" altLang="zh-CN" sz="1200">
+                <a:sym typeface="+mn-ea"/>
+              </a:rPr>
+              <a:t>     LSCR-1-25A</a:t>
+            </a:r>
+            <a:endParaRPr lang="zh-CN" altLang="en-US" sz="1200"/>
+          </a:p>
+        </p:txBody>
+      </p:sp>
+      <p:sp>
+        <p:nvSpPr>
+          <p:cNvPr id="22" name="矩形 21"/>
+          <p:cNvSpPr/>
+          <p:nvPr/>
+        </p:nvSpPr>
+        <p:spPr>
+          <a:xfrm>
+            <a:off x="214630" y="521335"/>
+            <a:ext cx="3416300" cy="1466850"/>
+          </a:xfrm>
+          <a:prstGeom prst="rect">
+            <a:avLst/>
+          </a:prstGeom>
+          <a:solidFill>
+            <a:schemeClr val="bg1">
+              <a:lumMod val="95000"/>
+            </a:schemeClr>
+          </a:solidFill>
+          <a:ln>
+            <a:noFill/>
+          </a:ln>
+        </p:spPr>
+        <p:style>
+          <a:lnRef idx="2">
+            <a:schemeClr val="accent1">
+              <a:lumMod val="75000"/>
+            </a:schemeClr>
+          </a:lnRef>
+          <a:fillRef idx="1">
+            <a:schemeClr val="accent1"/>
+          </a:fillRef>
+          <a:effectRef idx="0">
+            <a:srgbClr val="FFFFFF"/>
+          </a:effectRef>
+          <a:fontRef idx="minor">
+            <a:schemeClr val="lt1"/>
+          </a:fontRef>
+        </p:style>
+        <p:txBody>
+          <a:bodyPr rtlCol="0" anchor="ctr"/>
+          <a:p>
+            <a:pPr algn="ctr"/>
+            <a:endParaRPr lang="zh-CN" altLang="en-US"/>
+          </a:p>
+        </p:txBody>
+      </p:sp>
+      <p:sp>
+        <p:nvSpPr>
+          <p:cNvPr id="23" name="文本框 22"/>
+          <p:cNvSpPr txBox="1"/>
+          <p:nvPr/>
+        </p:nvSpPr>
+        <p:spPr>
+          <a:xfrm>
+            <a:off x="904240" y="645160"/>
+            <a:ext cx="2121535" cy="622935"/>
+          </a:xfrm>
+          <a:prstGeom prst="rect">
+            <a:avLst/>
+          </a:prstGeom>
+          <a:solidFill>
+            <a:schemeClr val="accent6">
+              <a:lumMod val="40000"/>
+              <a:lumOff val="60000"/>
+            </a:schemeClr>
+          </a:solidFill>
+          <a:ln>
+            <a:noFill/>
+          </a:ln>
+        </p:spPr>
+        <p:txBody>
+          <a:bodyPr wrap="square" rtlCol="0">
+            <a:noAutofit/>
+          </a:bodyPr>
+          <a:p>
+            <a:r>
+              <a:rPr lang="en-US" altLang="zh-CN"/>
+              <a:t> </a:t>
+            </a:r>
+            <a:r>
+              <a:rPr lang="zh-CN" altLang="en-US"/>
+              <a:t>反应炉加热丝加热</a:t>
+            </a:r>
+            <a:endParaRPr lang="zh-CN" altLang="en-US"/>
+          </a:p>
+        </p:txBody>
+      </p:sp>
+      <p:sp>
+        <p:nvSpPr>
+          <p:cNvPr id="25" name="矩形 24"/>
+          <p:cNvSpPr/>
+          <p:nvPr/>
+        </p:nvSpPr>
+        <p:spPr>
+          <a:xfrm>
+            <a:off x="541655" y="3604260"/>
+            <a:ext cx="2248535" cy="1466850"/>
+          </a:xfrm>
+          <a:prstGeom prst="rect">
+            <a:avLst/>
+          </a:prstGeom>
+          <a:solidFill>
+            <a:schemeClr val="bg1">
+              <a:lumMod val="95000"/>
+            </a:schemeClr>
+          </a:solidFill>
+          <a:ln>
+            <a:noFill/>
+          </a:ln>
+        </p:spPr>
+        <p:style>
+          <a:lnRef idx="2">
+            <a:schemeClr val="accent1">
+              <a:lumMod val="75000"/>
+            </a:schemeClr>
+          </a:lnRef>
+          <a:fillRef idx="1">
+            <a:schemeClr val="accent1"/>
+          </a:fillRef>
+          <a:effectRef idx="0">
+            <a:srgbClr val="FFFFFF"/>
+          </a:effectRef>
+          <a:fontRef idx="minor">
+            <a:schemeClr val="lt1"/>
+          </a:fontRef>
+        </p:style>
+        <p:txBody>
+          <a:bodyPr rtlCol="0" anchor="ctr"/>
+          <a:p>
+            <a:pPr algn="ctr"/>
+            <a:endParaRPr lang="zh-CN" altLang="en-US"/>
+          </a:p>
+        </p:txBody>
+      </p:sp>
+      <p:sp>
+        <p:nvSpPr>
+          <p:cNvPr id="26" name="文本框 25"/>
+          <p:cNvSpPr txBox="1"/>
+          <p:nvPr/>
+        </p:nvSpPr>
+        <p:spPr>
+          <a:xfrm>
+            <a:off x="783590" y="3728720"/>
+            <a:ext cx="1711960" cy="612775"/>
+          </a:xfrm>
+          <a:prstGeom prst="rect">
+            <a:avLst/>
+          </a:prstGeom>
+          <a:solidFill>
+            <a:schemeClr val="accent6">
+              <a:lumMod val="40000"/>
+              <a:lumOff val="60000"/>
+            </a:schemeClr>
+          </a:solidFill>
+          <a:ln>
+            <a:noFill/>
+          </a:ln>
+        </p:spPr>
+        <p:txBody>
+          <a:bodyPr wrap="square" rtlCol="0">
+            <a:noAutofit/>
+          </a:bodyPr>
+          <a:p>
+            <a:r>
+              <a:rPr lang="en-US" altLang="zh-CN"/>
+              <a:t>       </a:t>
+            </a:r>
+            <a:r>
+              <a:rPr lang="zh-CN" altLang="en-US"/>
+              <a:t>温</a:t>
+            </a:r>
+            <a:r>
+              <a:rPr lang="zh-CN" altLang="en-US"/>
+              <a:t>控器</a:t>
+            </a:r>
+            <a:endParaRPr lang="zh-CN" altLang="en-US"/>
+          </a:p>
+          <a:p>
+            <a:r>
+              <a:rPr lang="en-US" altLang="zh-CN"/>
+              <a:t>     </a:t>
+            </a:r>
+            <a:r>
+              <a:rPr lang="en-US" altLang="zh-CN" sz="1200"/>
+              <a:t>GTAX-S48-T</a:t>
+            </a:r>
+            <a:endParaRPr lang="en-US" altLang="zh-CN" sz="1200"/>
+          </a:p>
+        </p:txBody>
+      </p:sp>
+      <p:sp>
+        <p:nvSpPr>
+          <p:cNvPr id="28" name="文本框 27"/>
+          <p:cNvSpPr txBox="1"/>
+          <p:nvPr/>
+        </p:nvSpPr>
+        <p:spPr>
+          <a:xfrm>
+            <a:off x="4354195" y="6021705"/>
+            <a:ext cx="3226435" cy="444500"/>
+          </a:xfrm>
+          <a:prstGeom prst="rect">
+            <a:avLst/>
+          </a:prstGeom>
+          <a:solidFill>
+            <a:schemeClr val="accent5">
+              <a:lumMod val="40000"/>
+              <a:lumOff val="60000"/>
+            </a:schemeClr>
+          </a:solidFill>
+          <a:ln>
+            <a:noFill/>
+          </a:ln>
+        </p:spPr>
+        <p:txBody>
+          <a:bodyPr wrap="square" rtlCol="0">
+            <a:noAutofit/>
+          </a:bodyPr>
+          <a:p>
+            <a:r>
+              <a:rPr lang="en-US" altLang="zh-CN" sz="1000"/>
+              <a:t>SendPower(</a:t>
+            </a:r>
+            <a:r>
+              <a:rPr lang="en-US" altLang="zh-CN" sz="1000"/>
+              <a:t>int power)</a:t>
+            </a:r>
+            <a:endParaRPr lang="en-US" altLang="zh-CN" sz="1000"/>
+          </a:p>
+          <a:p>
+            <a:r>
+              <a:rPr lang="zh-CN" altLang="en-US" sz="1000"/>
+              <a:t>给控制板卡发送具体</a:t>
+            </a:r>
+            <a:r>
+              <a:rPr lang="zh-CN" altLang="en-US" sz="1000"/>
+              <a:t>功率</a:t>
+            </a:r>
+            <a:endParaRPr lang="zh-CN" altLang="en-US" sz="1000"/>
+          </a:p>
+        </p:txBody>
+      </p:sp>
+      <p:sp>
+        <p:nvSpPr>
+          <p:cNvPr id="29" name="文本框 28"/>
+          <p:cNvSpPr txBox="1"/>
+          <p:nvPr/>
+        </p:nvSpPr>
+        <p:spPr>
+          <a:xfrm>
+            <a:off x="4354195" y="4836795"/>
+            <a:ext cx="3226435" cy="444500"/>
+          </a:xfrm>
+          <a:prstGeom prst="rect">
+            <a:avLst/>
+          </a:prstGeom>
+          <a:solidFill>
+            <a:schemeClr val="accent5">
+              <a:lumMod val="40000"/>
+              <a:lumOff val="60000"/>
+            </a:schemeClr>
+          </a:solidFill>
+          <a:ln>
+            <a:noFill/>
+          </a:ln>
+        </p:spPr>
+        <p:txBody>
+          <a:bodyPr wrap="square" rtlCol="0">
+            <a:noAutofit/>
+          </a:bodyPr>
+          <a:p>
+            <a:r>
+              <a:rPr lang="en-US" altLang="zh-CN" sz="1000"/>
+              <a:t>CheckModeSwitch(</a:t>
+            </a:r>
+            <a:r>
+              <a:rPr lang="en-US" altLang="zh-CN" sz="1000"/>
+              <a:t>)</a:t>
+            </a:r>
+            <a:endParaRPr lang="en-US" altLang="zh-CN" sz="1000"/>
+          </a:p>
+          <a:p>
+            <a:r>
+              <a:rPr lang="zh-CN" altLang="en-US" sz="1000"/>
+              <a:t>切换加热模式</a:t>
+            </a:r>
+            <a:r>
+              <a:rPr lang="en-US" altLang="zh-CN" sz="1000"/>
+              <a:t> </a:t>
+            </a:r>
+            <a:r>
+              <a:rPr lang="zh-CN" altLang="en-US" sz="1000"/>
+              <a:t>加热模式</a:t>
+            </a:r>
+            <a:r>
+              <a:rPr lang="zh-CN" altLang="en-US" sz="1000"/>
+              <a:t>与恒温</a:t>
+            </a:r>
+            <a:r>
+              <a:rPr lang="zh-CN" altLang="en-US" sz="1000"/>
+              <a:t>模式</a:t>
+            </a:r>
+            <a:endParaRPr lang="zh-CN" altLang="en-US" sz="1000"/>
+          </a:p>
+        </p:txBody>
+      </p:sp>
+      <p:sp>
+        <p:nvSpPr>
+          <p:cNvPr id="30" name="文本框 29"/>
+          <p:cNvSpPr txBox="1"/>
+          <p:nvPr/>
+        </p:nvSpPr>
+        <p:spPr>
+          <a:xfrm>
+            <a:off x="4354195" y="5332730"/>
+            <a:ext cx="3226435" cy="558800"/>
+          </a:xfrm>
+          <a:prstGeom prst="rect">
+            <a:avLst/>
+          </a:prstGeom>
+          <a:solidFill>
+            <a:schemeClr val="accent5">
+              <a:lumMod val="40000"/>
+              <a:lumOff val="60000"/>
+            </a:schemeClr>
+          </a:solidFill>
+          <a:ln>
+            <a:noFill/>
+          </a:ln>
+        </p:spPr>
+        <p:txBody>
+          <a:bodyPr wrap="square" rtlCol="0">
+            <a:noAutofit/>
+          </a:bodyPr>
+          <a:p>
+            <a:r>
+              <a:rPr lang="en-US" altLang="zh-CN" sz="1000"/>
+              <a:t>CalculatePower(</a:t>
+            </a:r>
+            <a:r>
+              <a:rPr lang="en-US" altLang="zh-CN" sz="1000"/>
+              <a:t>)</a:t>
+            </a:r>
+            <a:endParaRPr lang="en-US" altLang="zh-CN" sz="1000"/>
+          </a:p>
+          <a:p>
+            <a:r>
+              <a:rPr lang="en-US" altLang="zh-CN" sz="1000"/>
+              <a:t>PID</a:t>
+            </a:r>
+            <a:r>
+              <a:rPr lang="zh-CN" altLang="en-US" sz="1000"/>
+              <a:t>算法根据目标温度与当前温度计算输出功率温度越高功率</a:t>
+            </a:r>
+            <a:r>
+              <a:rPr lang="zh-CN" altLang="en-US" sz="1000"/>
+              <a:t>越小</a:t>
+            </a:r>
+            <a:endParaRPr lang="zh-CN" altLang="en-US" sz="1000"/>
+          </a:p>
+        </p:txBody>
+      </p:sp>
+      <p:sp>
+        <p:nvSpPr>
+          <p:cNvPr id="31" name="文本框 30"/>
+          <p:cNvSpPr txBox="1"/>
+          <p:nvPr/>
+        </p:nvSpPr>
+        <p:spPr>
+          <a:xfrm>
+            <a:off x="4354195" y="4340860"/>
+            <a:ext cx="3226435" cy="444500"/>
+          </a:xfrm>
+          <a:prstGeom prst="rect">
+            <a:avLst/>
+          </a:prstGeom>
+          <a:solidFill>
+            <a:schemeClr val="accent5">
+              <a:lumMod val="40000"/>
+              <a:lumOff val="60000"/>
+            </a:schemeClr>
+          </a:solidFill>
+          <a:ln>
+            <a:noFill/>
+          </a:ln>
+        </p:spPr>
+        <p:txBody>
+          <a:bodyPr wrap="square" rtlCol="0">
+            <a:noAutofit/>
+          </a:bodyPr>
+          <a:p>
+            <a:r>
+              <a:rPr lang="en-US" altLang="zh-CN" sz="1000"/>
+              <a:t>reciveModbusRegThread(</a:t>
+            </a:r>
+            <a:r>
+              <a:rPr lang="en-US" altLang="zh-CN" sz="1000"/>
+              <a:t>int power)</a:t>
+            </a:r>
+            <a:endParaRPr lang="en-US" altLang="zh-CN" sz="1000"/>
+          </a:p>
+          <a:p>
+            <a:r>
+              <a:rPr lang="zh-CN" altLang="en-US" sz="1000"/>
+              <a:t>温度回采。通知温控模块当前</a:t>
+            </a:r>
+            <a:r>
+              <a:rPr lang="zh-CN" altLang="en-US" sz="1000"/>
+              <a:t>温度</a:t>
+            </a:r>
+            <a:endParaRPr lang="zh-CN" altLang="en-US" sz="1000"/>
+          </a:p>
+        </p:txBody>
+      </p:sp>
+      <p:sp>
+        <p:nvSpPr>
+          <p:cNvPr id="32" name="文本框 31"/>
+          <p:cNvSpPr txBox="1"/>
+          <p:nvPr/>
+        </p:nvSpPr>
+        <p:spPr>
+          <a:xfrm>
+            <a:off x="9372600" y="4441190"/>
+            <a:ext cx="2296795" cy="292100"/>
+          </a:xfrm>
+          <a:prstGeom prst="rect">
+            <a:avLst/>
+          </a:prstGeom>
+          <a:solidFill>
+            <a:schemeClr val="accent5">
+              <a:lumMod val="40000"/>
+              <a:lumOff val="60000"/>
+            </a:schemeClr>
+          </a:solidFill>
+          <a:ln>
+            <a:noFill/>
+          </a:ln>
+        </p:spPr>
+        <p:txBody>
+          <a:bodyPr wrap="square" rtlCol="0">
+            <a:noAutofit/>
+          </a:bodyPr>
+          <a:p>
+            <a:r>
+              <a:rPr lang="zh-CN" altLang="en-US" sz="1000"/>
+              <a:t>入参输出模拟量电流</a:t>
+            </a:r>
+            <a:r>
+              <a:rPr lang="en-US" altLang="zh-CN" sz="1000"/>
+              <a:t> 4mA-20mA</a:t>
+            </a:r>
+            <a:endParaRPr lang="en-US" altLang="zh-CN" sz="1000"/>
+          </a:p>
+        </p:txBody>
+      </p:sp>
+      <p:sp>
+        <p:nvSpPr>
+          <p:cNvPr id="33" name="文本框 32"/>
+          <p:cNvSpPr txBox="1"/>
+          <p:nvPr/>
+        </p:nvSpPr>
+        <p:spPr>
+          <a:xfrm>
+            <a:off x="9081135" y="1510665"/>
+            <a:ext cx="2296795" cy="292100"/>
+          </a:xfrm>
+          <a:prstGeom prst="rect">
+            <a:avLst/>
+          </a:prstGeom>
+          <a:solidFill>
+            <a:schemeClr val="accent5">
+              <a:lumMod val="40000"/>
+              <a:lumOff val="60000"/>
+            </a:schemeClr>
+          </a:solidFill>
+          <a:ln>
+            <a:noFill/>
+          </a:ln>
+        </p:spPr>
+        <p:txBody>
+          <a:bodyPr wrap="square" rtlCol="0">
+            <a:noAutofit/>
+          </a:bodyPr>
+          <a:p>
+            <a:r>
+              <a:rPr lang="en-US" altLang="zh-CN" sz="1000"/>
+              <a:t>4-20mA   </a:t>
+            </a:r>
+            <a:r>
+              <a:rPr lang="zh-CN" altLang="en-US" sz="1000"/>
+              <a:t>对应</a:t>
+            </a:r>
+            <a:r>
+              <a:rPr lang="en-US" altLang="zh-CN" sz="1000"/>
+              <a:t> 0-220V  </a:t>
+            </a:r>
+            <a:r>
+              <a:rPr lang="zh-CN" altLang="en-US" sz="1000"/>
+              <a:t>线性对应关系</a:t>
+            </a:r>
+            <a:endParaRPr lang="zh-CN" altLang="en-US" sz="1000"/>
+          </a:p>
+        </p:txBody>
+      </p:sp>
+      <p:sp>
+        <p:nvSpPr>
+          <p:cNvPr id="34" name="文本框 33"/>
+          <p:cNvSpPr txBox="1"/>
+          <p:nvPr/>
+        </p:nvSpPr>
+        <p:spPr>
+          <a:xfrm>
+            <a:off x="650240" y="4544695"/>
+            <a:ext cx="1994535" cy="292100"/>
+          </a:xfrm>
+          <a:prstGeom prst="rect">
+            <a:avLst/>
+          </a:prstGeom>
+          <a:solidFill>
+            <a:schemeClr val="accent5">
+              <a:lumMod val="40000"/>
+              <a:lumOff val="60000"/>
+            </a:schemeClr>
+          </a:solidFill>
+          <a:ln>
+            <a:noFill/>
+          </a:ln>
+        </p:spPr>
+        <p:txBody>
+          <a:bodyPr wrap="square" rtlCol="0">
+            <a:noAutofit/>
+          </a:bodyPr>
+          <a:p>
+            <a:r>
+              <a:rPr lang="en-US" altLang="zh-CN" sz="1000"/>
+              <a:t>         </a:t>
+            </a:r>
+            <a:r>
+              <a:rPr lang="zh-CN" altLang="en-US" sz="1000"/>
+              <a:t>采集反应炉中的</a:t>
+            </a:r>
+            <a:r>
+              <a:rPr lang="zh-CN" altLang="en-US" sz="1000"/>
+              <a:t>温度</a:t>
+            </a:r>
+            <a:endParaRPr lang="zh-CN" altLang="en-US" sz="1000"/>
+          </a:p>
+        </p:txBody>
+      </p:sp>
+      <p:sp>
+        <p:nvSpPr>
+          <p:cNvPr id="35" name="文本框 34"/>
+          <p:cNvSpPr txBox="1"/>
+          <p:nvPr/>
+        </p:nvSpPr>
+        <p:spPr>
+          <a:xfrm>
+            <a:off x="440690" y="1510665"/>
+            <a:ext cx="3120390" cy="292100"/>
+          </a:xfrm>
+          <a:prstGeom prst="rect">
+            <a:avLst/>
+          </a:prstGeom>
+          <a:solidFill>
+            <a:schemeClr val="accent5">
+              <a:lumMod val="40000"/>
+              <a:lumOff val="60000"/>
+            </a:schemeClr>
+          </a:solidFill>
+          <a:ln>
+            <a:noFill/>
+          </a:ln>
+        </p:spPr>
+        <p:txBody>
+          <a:bodyPr wrap="square" rtlCol="0">
+            <a:noAutofit/>
+          </a:bodyPr>
+          <a:p>
+            <a:r>
+              <a:rPr lang="zh-CN" altLang="en-US" sz="1000"/>
+              <a:t>两个反应管</a:t>
+            </a:r>
+            <a:r>
+              <a:rPr lang="en-US" altLang="zh-CN" sz="1000"/>
+              <a:t>,</a:t>
+            </a:r>
+            <a:r>
+              <a:rPr lang="zh-CN" altLang="en-US" sz="1000"/>
+              <a:t>每个管子有氧化</a:t>
+            </a:r>
+            <a:r>
+              <a:rPr lang="zh-CN" altLang="en-US" sz="1000"/>
+              <a:t>区加热，与催化区</a:t>
+            </a:r>
+            <a:r>
+              <a:rPr lang="zh-CN" altLang="en-US" sz="1000"/>
+              <a:t>加热</a:t>
+            </a:r>
+            <a:endParaRPr lang="zh-CN" altLang="en-US" sz="1000"/>
+          </a:p>
+        </p:txBody>
+      </p:sp>
+      <p:sp>
+        <p:nvSpPr>
+          <p:cNvPr id="36" name="左箭头 35"/>
+          <p:cNvSpPr/>
+          <p:nvPr/>
+        </p:nvSpPr>
+        <p:spPr>
+          <a:xfrm>
+            <a:off x="3638550" y="1223645"/>
+            <a:ext cx="4730115" cy="76200"/>
+          </a:xfrm>
+          <a:prstGeom prst="leftArrow">
+            <a:avLst/>
+          </a:prstGeom>
+        </p:spPr>
+        <p:style>
+          <a:lnRef idx="2">
+            <a:schemeClr val="accent1">
+              <a:lumMod val="75000"/>
+            </a:schemeClr>
+          </a:lnRef>
+          <a:fillRef idx="1">
+            <a:schemeClr val="accent1"/>
+          </a:fillRef>
+          <a:effectRef idx="0">
+            <a:srgbClr val="FFFFFF"/>
+          </a:effectRef>
+          <a:fontRef idx="minor">
+            <a:schemeClr val="lt1"/>
+          </a:fontRef>
+        </p:style>
+        <p:txBody>
+          <a:bodyPr rtlCol="0" anchor="ctr"/>
+          <a:p>
+            <a:pPr algn="ctr"/>
+            <a:endParaRPr lang="zh-CN" altLang="en-US"/>
+          </a:p>
+        </p:txBody>
+      </p:sp>
+      <p:sp>
+        <p:nvSpPr>
+          <p:cNvPr id="37" name="文本框 36"/>
+          <p:cNvSpPr txBox="1"/>
+          <p:nvPr/>
+        </p:nvSpPr>
+        <p:spPr>
+          <a:xfrm>
+            <a:off x="4781550" y="948055"/>
+            <a:ext cx="1740535" cy="275590"/>
+          </a:xfrm>
+          <a:prstGeom prst="rect">
+            <a:avLst/>
+          </a:prstGeom>
+          <a:noFill/>
+        </p:spPr>
+        <p:txBody>
+          <a:bodyPr wrap="square" rtlCol="0">
+            <a:spAutoFit/>
+          </a:bodyPr>
+          <a:p>
+            <a:r>
+              <a:rPr lang="zh-CN" altLang="en-US" sz="1200"/>
+              <a:t>控件加热丝的加热</a:t>
+            </a:r>
+            <a:endParaRPr lang="zh-CN" altLang="en-US" sz="1200"/>
+          </a:p>
+        </p:txBody>
+      </p:sp>
+      <p:sp>
+        <p:nvSpPr>
+          <p:cNvPr id="38" name="上箭头 37"/>
+          <p:cNvSpPr/>
+          <p:nvPr/>
+        </p:nvSpPr>
+        <p:spPr>
+          <a:xfrm>
+            <a:off x="1628775" y="2014220"/>
+            <a:ext cx="95250" cy="1590675"/>
+          </a:xfrm>
+          <a:prstGeom prst="upArrow">
+            <a:avLst/>
+          </a:prstGeom>
+        </p:spPr>
+        <p:style>
+          <a:lnRef idx="2">
+            <a:schemeClr val="accent1">
+              <a:lumMod val="75000"/>
+            </a:schemeClr>
+          </a:lnRef>
+          <a:fillRef idx="1">
+            <a:schemeClr val="accent1"/>
+          </a:fillRef>
+          <a:effectRef idx="0">
+            <a:srgbClr val="FFFFFF"/>
+          </a:effectRef>
+          <a:fontRef idx="minor">
+            <a:schemeClr val="lt1"/>
+          </a:fontRef>
+        </p:style>
+        <p:txBody>
+          <a:bodyPr rtlCol="0" anchor="ctr"/>
+          <a:p>
+            <a:pPr algn="ctr"/>
+            <a:endParaRPr lang="zh-CN" altLang="en-US"/>
+          </a:p>
+        </p:txBody>
+      </p:sp>
+      <p:sp>
+        <p:nvSpPr>
+          <p:cNvPr id="39" name="文本框 38"/>
+          <p:cNvSpPr txBox="1"/>
+          <p:nvPr/>
+        </p:nvSpPr>
+        <p:spPr>
+          <a:xfrm>
+            <a:off x="1724025" y="2121535"/>
+            <a:ext cx="367030" cy="1349375"/>
+          </a:xfrm>
+          <a:prstGeom prst="rect">
+            <a:avLst/>
+          </a:prstGeom>
+          <a:noFill/>
+        </p:spPr>
+        <p:txBody>
+          <a:bodyPr vert="eaVert" wrap="square" rtlCol="0">
+            <a:spAutoFit/>
+          </a:bodyPr>
+          <a:p>
+            <a:r>
+              <a:rPr lang="zh-CN" altLang="en-US" sz="1200"/>
+              <a:t>采集反应区的温度</a:t>
+            </a:r>
+            <a:endParaRPr lang="zh-CN" altLang="en-US" sz="1200"/>
+          </a:p>
+        </p:txBody>
+      </p:sp>
+      <p:sp>
+        <p:nvSpPr>
+          <p:cNvPr id="41" name="左箭头 40"/>
+          <p:cNvSpPr/>
+          <p:nvPr/>
+        </p:nvSpPr>
+        <p:spPr>
+          <a:xfrm>
+            <a:off x="2814320" y="4404995"/>
+            <a:ext cx="1333500" cy="123825"/>
+          </a:xfrm>
+          <a:prstGeom prst="leftArrow">
+            <a:avLst/>
+          </a:prstGeom>
+        </p:spPr>
+        <p:style>
+          <a:lnRef idx="2">
+            <a:schemeClr val="accent1">
+              <a:lumMod val="75000"/>
+            </a:schemeClr>
+          </a:lnRef>
+          <a:fillRef idx="1">
+            <a:schemeClr val="accent1"/>
+          </a:fillRef>
+          <a:effectRef idx="0">
+            <a:srgbClr val="FFFFFF"/>
+          </a:effectRef>
+          <a:fontRef idx="minor">
+            <a:schemeClr val="lt1"/>
+          </a:fontRef>
+        </p:style>
+        <p:txBody>
+          <a:bodyPr rtlCol="0" anchor="ctr"/>
+          <a:p>
+            <a:pPr algn="ctr"/>
+            <a:endParaRPr lang="zh-CN" altLang="en-US"/>
+          </a:p>
+        </p:txBody>
+      </p:sp>
+      <p:sp>
+        <p:nvSpPr>
+          <p:cNvPr id="42" name="文本框 41"/>
+          <p:cNvSpPr txBox="1"/>
+          <p:nvPr/>
+        </p:nvSpPr>
+        <p:spPr>
+          <a:xfrm>
+            <a:off x="2794000" y="4006215"/>
+            <a:ext cx="1396365" cy="398780"/>
+          </a:xfrm>
+          <a:prstGeom prst="rect">
+            <a:avLst/>
+          </a:prstGeom>
+          <a:noFill/>
+        </p:spPr>
+        <p:txBody>
+          <a:bodyPr wrap="square" rtlCol="0">
+            <a:spAutoFit/>
+          </a:bodyPr>
+          <a:p>
+            <a:r>
+              <a:rPr lang="en-US" altLang="zh-CN" sz="1000"/>
+              <a:t>ModBus</a:t>
+            </a:r>
+            <a:r>
+              <a:rPr lang="zh-CN" altLang="en-US" sz="1000"/>
+              <a:t>命令</a:t>
+            </a:r>
+            <a:r>
+              <a:rPr lang="en-US" altLang="zh-CN" sz="1000"/>
+              <a:t>10</a:t>
+            </a:r>
+            <a:r>
+              <a:rPr lang="zh-CN" altLang="en-US" sz="1000"/>
+              <a:t>秒</a:t>
+            </a:r>
+            <a:endParaRPr lang="zh-CN" altLang="en-US" sz="1000"/>
+          </a:p>
+          <a:p>
+            <a:r>
+              <a:rPr lang="zh-CN" altLang="en-US" sz="1000"/>
+              <a:t>读取一次温度值</a:t>
+            </a:r>
+            <a:endParaRPr lang="zh-CN" altLang="en-US" sz="1000"/>
+          </a:p>
+        </p:txBody>
+      </p:sp>
+      <p:sp>
+        <p:nvSpPr>
+          <p:cNvPr id="43" name="右箭头 42"/>
+          <p:cNvSpPr/>
+          <p:nvPr/>
+        </p:nvSpPr>
+        <p:spPr>
+          <a:xfrm>
+            <a:off x="7734300" y="4319270"/>
+            <a:ext cx="1581150" cy="85725"/>
+          </a:xfrm>
+          <a:prstGeom prst="rightArrow">
+            <a:avLst/>
+          </a:prstGeom>
+        </p:spPr>
+        <p:style>
+          <a:lnRef idx="2">
+            <a:schemeClr val="accent1">
+              <a:lumMod val="75000"/>
+            </a:schemeClr>
+          </a:lnRef>
+          <a:fillRef idx="1">
+            <a:schemeClr val="accent1"/>
+          </a:fillRef>
+          <a:effectRef idx="0">
+            <a:srgbClr val="FFFFFF"/>
+          </a:effectRef>
+          <a:fontRef idx="minor">
+            <a:schemeClr val="lt1"/>
+          </a:fontRef>
+        </p:style>
+        <p:txBody>
+          <a:bodyPr rtlCol="0" anchor="ctr"/>
+          <a:p>
+            <a:pPr algn="ctr"/>
+            <a:endParaRPr lang="zh-CN" altLang="en-US"/>
+          </a:p>
+        </p:txBody>
+      </p:sp>
+      <p:sp>
+        <p:nvSpPr>
+          <p:cNvPr id="45" name="文本框 44"/>
+          <p:cNvSpPr txBox="1"/>
+          <p:nvPr/>
+        </p:nvSpPr>
+        <p:spPr>
+          <a:xfrm>
+            <a:off x="7694295" y="3920490"/>
+            <a:ext cx="1711960" cy="398780"/>
+          </a:xfrm>
+          <a:prstGeom prst="rect">
+            <a:avLst/>
+          </a:prstGeom>
+          <a:noFill/>
+        </p:spPr>
+        <p:txBody>
+          <a:bodyPr wrap="square" rtlCol="0">
+            <a:spAutoFit/>
+          </a:bodyPr>
+          <a:p>
+            <a:r>
+              <a:rPr lang="zh-CN" altLang="en-US" sz="1000"/>
+              <a:t>将计算的电压转为</a:t>
+            </a:r>
+            <a:r>
+              <a:rPr lang="en-US" altLang="zh-CN" sz="1000"/>
+              <a:t> 4-20mA</a:t>
+            </a:r>
+            <a:r>
+              <a:rPr lang="zh-CN" altLang="en-US" sz="1000"/>
+              <a:t>电流通过</a:t>
+            </a:r>
+            <a:r>
+              <a:rPr lang="en-US" altLang="zh-CN" sz="1000"/>
+              <a:t>ModBus</a:t>
+            </a:r>
+            <a:r>
+              <a:rPr lang="zh-CN" altLang="en-US" sz="1000"/>
+              <a:t>命令下发</a:t>
+            </a:r>
+            <a:endParaRPr lang="zh-CN" altLang="en-US" sz="1000"/>
+          </a:p>
+        </p:txBody>
+      </p:sp>
+      <p:sp>
+        <p:nvSpPr>
+          <p:cNvPr id="46" name="上箭头 45"/>
+          <p:cNvSpPr/>
+          <p:nvPr/>
+        </p:nvSpPr>
+        <p:spPr>
+          <a:xfrm>
+            <a:off x="10386695" y="1985645"/>
+            <a:ext cx="75565" cy="1609725"/>
+          </a:xfrm>
+          <a:prstGeom prst="upArrow">
+            <a:avLst/>
+          </a:prstGeom>
+        </p:spPr>
+        <p:style>
+          <a:lnRef idx="2">
+            <a:schemeClr val="accent1">
+              <a:lumMod val="75000"/>
+            </a:schemeClr>
+          </a:lnRef>
+          <a:fillRef idx="1">
+            <a:schemeClr val="accent1"/>
+          </a:fillRef>
+          <a:effectRef idx="0">
+            <a:srgbClr val="FFFFFF"/>
+          </a:effectRef>
+          <a:fontRef idx="minor">
+            <a:schemeClr val="lt1"/>
+          </a:fontRef>
+        </p:style>
+        <p:txBody>
+          <a:bodyPr rtlCol="0" anchor="ctr"/>
+          <a:p>
+            <a:pPr algn="ctr"/>
+            <a:endParaRPr lang="zh-CN" altLang="en-US"/>
+          </a:p>
+        </p:txBody>
+      </p:sp>
+    </p:spTree>
+    <p:custDataLst>
+      <p:tags r:id="rId1"/>
+    </p:custDataLst>
+  </p:cSld>
+  <p:clrMapOvr>
+    <a:masterClrMapping/>
+  </p:clrMapOvr>
+</p:sld>
+</file>
+
+<file path=ppt/slides/slide3.xml><?xml version="1.0" encoding="utf-8"?>
+<p:sld xmlns:a="http://schemas.openxmlformats.org/drawingml/2006/main" xmlns:r="http://schemas.openxmlformats.org/officeDocument/2006/relationships" xmlns:p="http://schemas.openxmlformats.org/presentationml/2006/main">
+  <p:cSld>
+    <p:bg>
+      <p:bgPr>
+        <a:solidFill>
+          <a:schemeClr val="accent1">
+            <a:lumMod val="20000"/>
+            <a:lumOff val="80000"/>
+          </a:schemeClr>
+        </a:solidFill>
+        <a:effectLst/>
+      </p:bgPr>
+    </p:bg>
+    <p:spTree>
+      <p:nvGrpSpPr>
+        <p:cNvPr id="1" name=""/>
+        <p:cNvGrpSpPr/>
+        <p:nvPr/>
+      </p:nvGrpSpPr>
+      <p:grpSpPr/>
+      <p:sp>
+        <p:nvSpPr>
+          <p:cNvPr id="15" name="矩形 14"/>
+          <p:cNvSpPr/>
+          <p:nvPr/>
+        </p:nvSpPr>
+        <p:spPr>
+          <a:xfrm>
+            <a:off x="4649470" y="2695575"/>
+            <a:ext cx="3420110" cy="1466850"/>
+          </a:xfrm>
+          <a:prstGeom prst="rect">
+            <a:avLst/>
+          </a:prstGeom>
+          <a:solidFill>
+            <a:schemeClr val="bg1">
+              <a:lumMod val="95000"/>
+            </a:schemeClr>
+          </a:solidFill>
+          <a:ln>
+            <a:noFill/>
+          </a:ln>
+        </p:spPr>
+        <p:style>
+          <a:lnRef idx="2">
+            <a:schemeClr val="accent1">
+              <a:lumMod val="75000"/>
+            </a:schemeClr>
+          </a:lnRef>
+          <a:fillRef idx="1">
+            <a:schemeClr val="accent1"/>
+          </a:fillRef>
+          <a:effectRef idx="0">
+            <a:srgbClr val="FFFFFF"/>
+          </a:effectRef>
+          <a:fontRef idx="minor">
+            <a:schemeClr val="lt1"/>
+          </a:fontRef>
+        </p:style>
+        <p:txBody>
+          <a:bodyPr rtlCol="0" anchor="ctr"/>
+          <a:p>
+            <a:pPr algn="ctr"/>
+            <a:endParaRPr lang="zh-CN" altLang="en-US"/>
+          </a:p>
+        </p:txBody>
+      </p:sp>
+      <p:sp>
+        <p:nvSpPr>
+          <p:cNvPr id="16" name="文本框 15"/>
+          <p:cNvSpPr txBox="1"/>
+          <p:nvPr/>
+        </p:nvSpPr>
+        <p:spPr>
+          <a:xfrm>
+            <a:off x="4947285" y="2819400"/>
+            <a:ext cx="2804795" cy="582930"/>
+          </a:xfrm>
+          <a:prstGeom prst="rect">
+            <a:avLst/>
+          </a:prstGeom>
+          <a:solidFill>
+            <a:schemeClr val="accent6">
+              <a:lumMod val="40000"/>
+              <a:lumOff val="60000"/>
+            </a:schemeClr>
+          </a:solidFill>
+          <a:ln>
+            <a:noFill/>
+          </a:ln>
+        </p:spPr>
+        <p:txBody>
+          <a:bodyPr wrap="square" rtlCol="0">
+            <a:noAutofit/>
+          </a:bodyPr>
+          <a:p>
+            <a:r>
+              <a:rPr lang="en-US" altLang="zh-CN"/>
+              <a:t>       </a:t>
+            </a:r>
+            <a:r>
+              <a:rPr lang="zh-CN" altLang="en-US"/>
+              <a:t>模拟量控制</a:t>
+            </a:r>
+            <a:r>
+              <a:rPr lang="zh-CN" altLang="en-US"/>
+              <a:t>模块</a:t>
+            </a:r>
+            <a:endParaRPr lang="zh-CN" altLang="en-US"/>
+          </a:p>
+          <a:p>
+            <a:r>
+              <a:rPr lang="en-US" altLang="zh-CN" sz="1200">
+                <a:sym typeface="+mn-ea"/>
+              </a:rPr>
+              <a:t>                JY-AMDAIAO </a:t>
+            </a:r>
+            <a:endParaRPr lang="en-US" altLang="zh-CN" sz="1200">
+              <a:sym typeface="+mn-ea"/>
+            </a:endParaRPr>
+          </a:p>
+        </p:txBody>
+      </p:sp>
+      <p:sp>
+        <p:nvSpPr>
+          <p:cNvPr id="32" name="文本框 31"/>
+          <p:cNvSpPr txBox="1"/>
+          <p:nvPr/>
+        </p:nvSpPr>
+        <p:spPr>
+          <a:xfrm>
+            <a:off x="4947920" y="3531870"/>
+            <a:ext cx="2804160" cy="292100"/>
+          </a:xfrm>
+          <a:prstGeom prst="rect">
+            <a:avLst/>
+          </a:prstGeom>
+          <a:solidFill>
+            <a:schemeClr val="accent5">
+              <a:lumMod val="40000"/>
+              <a:lumOff val="60000"/>
+            </a:schemeClr>
+          </a:solidFill>
+          <a:ln>
+            <a:noFill/>
+          </a:ln>
+        </p:spPr>
+        <p:txBody>
+          <a:bodyPr wrap="square" rtlCol="0">
+            <a:noAutofit/>
+          </a:bodyPr>
+          <a:p>
+            <a:r>
+              <a:rPr lang="zh-CN" altLang="en-US" sz="1000"/>
+              <a:t>入参输出模拟量电流</a:t>
+            </a:r>
+            <a:r>
+              <a:rPr lang="en-US" altLang="zh-CN" sz="1000"/>
+              <a:t> 4mA-20mA,</a:t>
+            </a:r>
+            <a:r>
+              <a:rPr lang="zh-CN" altLang="en-US" sz="1000"/>
+              <a:t>同时控制</a:t>
+            </a:r>
+            <a:r>
+              <a:rPr lang="zh-CN" altLang="en-US" sz="1000"/>
+              <a:t>气流</a:t>
+            </a:r>
+            <a:endParaRPr lang="zh-CN" altLang="en-US" sz="1000"/>
+          </a:p>
+        </p:txBody>
+      </p:sp>
+      <p:sp>
+        <p:nvSpPr>
+          <p:cNvPr id="4" name="矩形 3"/>
+          <p:cNvSpPr/>
+          <p:nvPr/>
+        </p:nvSpPr>
+        <p:spPr>
+          <a:xfrm>
+            <a:off x="8927465" y="2695575"/>
+            <a:ext cx="2595245" cy="1466850"/>
+          </a:xfrm>
+          <a:prstGeom prst="rect">
+            <a:avLst/>
+          </a:prstGeom>
+          <a:solidFill>
+            <a:schemeClr val="bg1">
+              <a:lumMod val="95000"/>
+            </a:schemeClr>
+          </a:solidFill>
+          <a:ln>
+            <a:noFill/>
+          </a:ln>
+        </p:spPr>
+        <p:style>
+          <a:lnRef idx="2">
+            <a:schemeClr val="accent1">
+              <a:lumMod val="75000"/>
+            </a:schemeClr>
+          </a:lnRef>
+          <a:fillRef idx="1">
+            <a:schemeClr val="accent1"/>
+          </a:fillRef>
+          <a:effectRef idx="0">
+            <a:srgbClr val="FFFFFF"/>
+          </a:effectRef>
+          <a:fontRef idx="minor">
+            <a:schemeClr val="lt1"/>
+          </a:fontRef>
+        </p:style>
+        <p:txBody>
+          <a:bodyPr rtlCol="0" anchor="ctr"/>
+          <a:p>
+            <a:pPr algn="ctr"/>
+            <a:endParaRPr lang="zh-CN" altLang="en-US"/>
+          </a:p>
+        </p:txBody>
+      </p:sp>
+      <p:sp>
+        <p:nvSpPr>
+          <p:cNvPr id="5" name="文本框 4"/>
+          <p:cNvSpPr txBox="1"/>
+          <p:nvPr/>
+        </p:nvSpPr>
+        <p:spPr>
+          <a:xfrm>
+            <a:off x="9223375" y="2819400"/>
+            <a:ext cx="1981835" cy="582930"/>
+          </a:xfrm>
+          <a:prstGeom prst="rect">
+            <a:avLst/>
+          </a:prstGeom>
+          <a:solidFill>
+            <a:schemeClr val="accent6">
+              <a:lumMod val="40000"/>
+              <a:lumOff val="60000"/>
+            </a:schemeClr>
+          </a:solidFill>
+          <a:ln>
+            <a:noFill/>
+          </a:ln>
+        </p:spPr>
+        <p:txBody>
+          <a:bodyPr wrap="square" rtlCol="0">
+            <a:noAutofit/>
+          </a:bodyPr>
+          <a:p>
+            <a:r>
+              <a:rPr lang="en-US" altLang="zh-CN"/>
+              <a:t>        </a:t>
+            </a:r>
+            <a:r>
+              <a:rPr lang="zh-CN" altLang="en-US"/>
+              <a:t>流量计</a:t>
+            </a:r>
+            <a:endParaRPr lang="zh-CN" altLang="en-US"/>
+          </a:p>
+          <a:p>
+            <a:r>
+              <a:rPr lang="en-US" altLang="zh-CN" sz="1200">
+                <a:sym typeface="+mn-ea"/>
+              </a:rPr>
+              <a:t>                </a:t>
+            </a:r>
+            <a:r>
+              <a:rPr lang="en-US" altLang="zh-CN" sz="1200">
+                <a:sym typeface="+mn-ea"/>
+              </a:rPr>
+              <a:t>AS200</a:t>
+            </a:r>
+            <a:endParaRPr lang="en-US" altLang="zh-CN" sz="1200">
+              <a:sym typeface="+mn-ea"/>
+            </a:endParaRPr>
+          </a:p>
+        </p:txBody>
+      </p:sp>
+      <p:sp>
+        <p:nvSpPr>
+          <p:cNvPr id="6" name="文本框 5"/>
+          <p:cNvSpPr txBox="1"/>
+          <p:nvPr/>
+        </p:nvSpPr>
+        <p:spPr>
+          <a:xfrm>
+            <a:off x="9223375" y="3531870"/>
+            <a:ext cx="1981835" cy="292100"/>
+          </a:xfrm>
+          <a:prstGeom prst="rect">
+            <a:avLst/>
+          </a:prstGeom>
+          <a:solidFill>
+            <a:schemeClr val="accent5">
+              <a:lumMod val="40000"/>
+              <a:lumOff val="60000"/>
+            </a:schemeClr>
+          </a:solidFill>
+          <a:ln>
+            <a:noFill/>
+          </a:ln>
+        </p:spPr>
+        <p:txBody>
+          <a:bodyPr wrap="square" rtlCol="0">
+            <a:noAutofit/>
+          </a:bodyPr>
+          <a:p>
+            <a:r>
+              <a:rPr lang="en-US" altLang="zh-CN" sz="1000"/>
+              <a:t> </a:t>
+            </a:r>
+            <a:r>
+              <a:rPr lang="zh-CN" altLang="en-US" sz="1000"/>
+              <a:t>输出模拟量电流</a:t>
+            </a:r>
+            <a:r>
+              <a:rPr lang="en-US" altLang="zh-CN" sz="1000"/>
+              <a:t> 4mA-20mA</a:t>
+            </a:r>
+            <a:endParaRPr lang="en-US" altLang="zh-CN" sz="1000"/>
+          </a:p>
+        </p:txBody>
+      </p:sp>
+      <p:sp>
+        <p:nvSpPr>
+          <p:cNvPr id="7" name="矩形 6"/>
+          <p:cNvSpPr/>
+          <p:nvPr/>
+        </p:nvSpPr>
+        <p:spPr>
+          <a:xfrm>
+            <a:off x="900430" y="2695575"/>
+            <a:ext cx="2595245" cy="1466850"/>
+          </a:xfrm>
+          <a:prstGeom prst="rect">
+            <a:avLst/>
+          </a:prstGeom>
+          <a:solidFill>
+            <a:schemeClr val="bg1">
+              <a:lumMod val="95000"/>
+            </a:schemeClr>
+          </a:solidFill>
+          <a:ln>
+            <a:noFill/>
+          </a:ln>
+        </p:spPr>
+        <p:style>
+          <a:lnRef idx="2">
+            <a:schemeClr val="accent1">
+              <a:lumMod val="75000"/>
+            </a:schemeClr>
+          </a:lnRef>
+          <a:fillRef idx="1">
+            <a:schemeClr val="accent1"/>
+          </a:fillRef>
+          <a:effectRef idx="0">
+            <a:srgbClr val="FFFFFF"/>
+          </a:effectRef>
+          <a:fontRef idx="minor">
+            <a:schemeClr val="lt1"/>
+          </a:fontRef>
+        </p:style>
+        <p:txBody>
+          <a:bodyPr rtlCol="0" anchor="ctr"/>
+          <a:p>
+            <a:pPr algn="ctr"/>
+            <a:endParaRPr lang="zh-CN" altLang="en-US"/>
+          </a:p>
+        </p:txBody>
+      </p:sp>
+      <p:sp>
+        <p:nvSpPr>
+          <p:cNvPr id="8" name="文本框 7"/>
+          <p:cNvSpPr txBox="1"/>
+          <p:nvPr/>
+        </p:nvSpPr>
+        <p:spPr>
+          <a:xfrm>
+            <a:off x="1196340" y="2819400"/>
+            <a:ext cx="1981835" cy="582930"/>
+          </a:xfrm>
+          <a:prstGeom prst="rect">
+            <a:avLst/>
+          </a:prstGeom>
+          <a:solidFill>
+            <a:schemeClr val="accent6">
+              <a:lumMod val="40000"/>
+              <a:lumOff val="60000"/>
+            </a:schemeClr>
+          </a:solidFill>
+          <a:ln>
+            <a:noFill/>
+          </a:ln>
+        </p:spPr>
+        <p:txBody>
+          <a:bodyPr wrap="square" rtlCol="0">
+            <a:noAutofit/>
+          </a:bodyPr>
+          <a:p>
+            <a:r>
+              <a:rPr lang="en-US" altLang="zh-CN"/>
+              <a:t>         </a:t>
+            </a:r>
+            <a:r>
+              <a:rPr lang="zh-CN" altLang="en-US"/>
+              <a:t>上位机</a:t>
+            </a:r>
+            <a:endParaRPr lang="zh-CN" altLang="en-US"/>
+          </a:p>
+          <a:p>
+            <a:r>
+              <a:rPr lang="en-US" altLang="zh-CN" sz="1200">
+                <a:sym typeface="+mn-ea"/>
+              </a:rPr>
+              <a:t>        </a:t>
+            </a:r>
+            <a:endParaRPr lang="en-US" altLang="zh-CN" sz="1200">
+              <a:sym typeface="+mn-ea"/>
+            </a:endParaRPr>
+          </a:p>
+        </p:txBody>
+      </p:sp>
+      <p:sp>
+        <p:nvSpPr>
+          <p:cNvPr id="9" name="文本框 8"/>
+          <p:cNvSpPr txBox="1"/>
+          <p:nvPr/>
+        </p:nvSpPr>
+        <p:spPr>
+          <a:xfrm>
+            <a:off x="1014730" y="3531870"/>
+            <a:ext cx="2383155" cy="292100"/>
+          </a:xfrm>
+          <a:prstGeom prst="rect">
+            <a:avLst/>
+          </a:prstGeom>
+          <a:solidFill>
+            <a:schemeClr val="accent5">
+              <a:lumMod val="40000"/>
+              <a:lumOff val="60000"/>
+            </a:schemeClr>
+          </a:solidFill>
+          <a:ln>
+            <a:noFill/>
+          </a:ln>
+        </p:spPr>
+        <p:txBody>
+          <a:bodyPr wrap="square" rtlCol="0">
+            <a:noAutofit/>
+          </a:bodyPr>
+          <a:p>
+            <a:r>
+              <a:rPr lang="zh-CN" altLang="en-US" sz="1000"/>
+              <a:t>发送</a:t>
+            </a:r>
+            <a:r>
+              <a:rPr lang="en-US" altLang="zh-CN" sz="1000"/>
+              <a:t>ModBus</a:t>
+            </a:r>
+            <a:r>
+              <a:rPr lang="zh-CN" altLang="en-US" sz="1000"/>
+              <a:t>命令给控制模块设置</a:t>
+            </a:r>
+            <a:r>
+              <a:rPr lang="zh-CN" altLang="en-US" sz="1000"/>
+              <a:t>电流</a:t>
+            </a:r>
+            <a:endParaRPr lang="zh-CN" altLang="en-US" sz="1000"/>
+          </a:p>
+        </p:txBody>
+      </p:sp>
+      <p:sp>
+        <p:nvSpPr>
+          <p:cNvPr id="10" name="右箭头 9"/>
+          <p:cNvSpPr/>
+          <p:nvPr/>
+        </p:nvSpPr>
+        <p:spPr>
+          <a:xfrm>
+            <a:off x="3497580" y="3375660"/>
+            <a:ext cx="1140460" cy="143510"/>
+          </a:xfrm>
+          <a:prstGeom prst="rightArrow">
+            <a:avLst/>
+          </a:prstGeom>
+        </p:spPr>
+        <p:style>
+          <a:lnRef idx="2">
+            <a:schemeClr val="accent1">
+              <a:lumMod val="75000"/>
+            </a:schemeClr>
+          </a:lnRef>
+          <a:fillRef idx="1">
+            <a:schemeClr val="accent1"/>
+          </a:fillRef>
+          <a:effectRef idx="0">
+            <a:srgbClr val="FFFFFF"/>
+          </a:effectRef>
+          <a:fontRef idx="minor">
+            <a:schemeClr val="lt1"/>
+          </a:fontRef>
+        </p:style>
+        <p:txBody>
+          <a:bodyPr rtlCol="0" anchor="ctr"/>
+          <a:p>
+            <a:pPr algn="ctr"/>
+            <a:endParaRPr lang="zh-CN" altLang="en-US"/>
+          </a:p>
+        </p:txBody>
+      </p:sp>
+      <p:sp>
+        <p:nvSpPr>
+          <p:cNvPr id="11" name="右箭头 10"/>
+          <p:cNvSpPr/>
+          <p:nvPr/>
+        </p:nvSpPr>
+        <p:spPr>
+          <a:xfrm>
+            <a:off x="8079105" y="3739515"/>
+            <a:ext cx="842010" cy="76200"/>
+          </a:xfrm>
+          <a:prstGeom prst="rightArrow">
+            <a:avLst/>
+          </a:prstGeom>
+        </p:spPr>
+        <p:style>
+          <a:lnRef idx="2">
+            <a:schemeClr val="accent1">
+              <a:lumMod val="75000"/>
+            </a:schemeClr>
+          </a:lnRef>
+          <a:fillRef idx="1">
+            <a:schemeClr val="accent1"/>
+          </a:fillRef>
+          <a:effectRef idx="0">
+            <a:srgbClr val="FFFFFF"/>
+          </a:effectRef>
+          <a:fontRef idx="minor">
+            <a:schemeClr val="lt1"/>
+          </a:fontRef>
+        </p:style>
+        <p:txBody>
+          <a:bodyPr rtlCol="0" anchor="ctr"/>
+          <a:p>
+            <a:pPr algn="ctr"/>
+            <a:endParaRPr lang="zh-CN" altLang="en-US"/>
+          </a:p>
+        </p:txBody>
+      </p:sp>
+      <p:sp>
+        <p:nvSpPr>
+          <p:cNvPr id="12" name="左箭头 11"/>
+          <p:cNvSpPr/>
+          <p:nvPr/>
+        </p:nvSpPr>
+        <p:spPr>
+          <a:xfrm>
+            <a:off x="8069580" y="3088005"/>
+            <a:ext cx="853440" cy="75565"/>
+          </a:xfrm>
+          <a:prstGeom prst="leftArrow">
+            <a:avLst/>
+          </a:prstGeom>
+        </p:spPr>
+        <p:style>
+          <a:lnRef idx="2">
+            <a:schemeClr val="accent1">
+              <a:lumMod val="75000"/>
+            </a:schemeClr>
+          </a:lnRef>
+          <a:fillRef idx="1">
+            <a:schemeClr val="accent1"/>
+          </a:fillRef>
+          <a:effectRef idx="0">
+            <a:srgbClr val="FFFFFF"/>
+          </a:effectRef>
+          <a:fontRef idx="minor">
+            <a:schemeClr val="lt1"/>
+          </a:fontRef>
+        </p:style>
+        <p:txBody>
+          <a:bodyPr rtlCol="0" anchor="ctr"/>
+          <a:p>
+            <a:pPr algn="ctr"/>
+            <a:endParaRPr lang="zh-CN" altLang="en-US"/>
+          </a:p>
+        </p:txBody>
+      </p:sp>
+      <p:sp>
+        <p:nvSpPr>
+          <p:cNvPr id="13" name="文本框 12"/>
+          <p:cNvSpPr txBox="1"/>
+          <p:nvPr/>
+        </p:nvSpPr>
+        <p:spPr>
+          <a:xfrm>
+            <a:off x="3553460" y="3068955"/>
+            <a:ext cx="1018540" cy="245110"/>
+          </a:xfrm>
+          <a:prstGeom prst="rect">
+            <a:avLst/>
+          </a:prstGeom>
+          <a:noFill/>
+        </p:spPr>
+        <p:txBody>
+          <a:bodyPr wrap="square" rtlCol="0">
+            <a:spAutoFit/>
+          </a:bodyPr>
+          <a:p>
+            <a:r>
+              <a:rPr lang="en-US" altLang="zh-CN" sz="1000"/>
+              <a:t>ModBus</a:t>
+            </a:r>
+            <a:r>
+              <a:rPr lang="zh-CN" altLang="en-US" sz="1000"/>
+              <a:t>命令</a:t>
+            </a:r>
+            <a:endParaRPr lang="zh-CN" altLang="en-US" sz="1000"/>
+          </a:p>
+        </p:txBody>
+      </p:sp>
+      <p:sp>
+        <p:nvSpPr>
+          <p:cNvPr id="19" name="文本框 18"/>
+          <p:cNvSpPr txBox="1"/>
+          <p:nvPr/>
+        </p:nvSpPr>
+        <p:spPr>
+          <a:xfrm>
+            <a:off x="8147050" y="2695575"/>
+            <a:ext cx="711835" cy="398780"/>
+          </a:xfrm>
+          <a:prstGeom prst="rect">
+            <a:avLst/>
+          </a:prstGeom>
+          <a:noFill/>
+        </p:spPr>
+        <p:txBody>
+          <a:bodyPr wrap="square" rtlCol="0">
+            <a:spAutoFit/>
+          </a:bodyPr>
+          <a:p>
+            <a:r>
+              <a:rPr lang="zh-CN" altLang="en-US" sz="1000"/>
+              <a:t>回传模</a:t>
+            </a:r>
+            <a:endParaRPr lang="zh-CN" altLang="en-US" sz="1000"/>
+          </a:p>
+          <a:p>
+            <a:r>
+              <a:rPr lang="zh-CN" altLang="en-US" sz="1000"/>
+              <a:t>拟</a:t>
+            </a:r>
+            <a:r>
+              <a:rPr lang="zh-CN" altLang="en-US" sz="1000"/>
+              <a:t>电流</a:t>
+            </a:r>
+            <a:endParaRPr lang="zh-CN" altLang="en-US" sz="1000"/>
+          </a:p>
+        </p:txBody>
+      </p:sp>
+      <p:sp>
+        <p:nvSpPr>
+          <p:cNvPr id="24" name="文本框 23"/>
+          <p:cNvSpPr txBox="1"/>
+          <p:nvPr/>
+        </p:nvSpPr>
+        <p:spPr>
+          <a:xfrm>
+            <a:off x="8199755" y="3823970"/>
+            <a:ext cx="597535" cy="398780"/>
+          </a:xfrm>
+          <a:prstGeom prst="rect">
+            <a:avLst/>
+          </a:prstGeom>
+          <a:noFill/>
+        </p:spPr>
+        <p:txBody>
+          <a:bodyPr wrap="square" rtlCol="0">
+            <a:spAutoFit/>
+          </a:bodyPr>
+          <a:p>
+            <a:r>
+              <a:rPr lang="zh-CN" altLang="en-US" sz="1000"/>
+              <a:t>输出模</a:t>
+            </a:r>
+            <a:endParaRPr lang="zh-CN" altLang="en-US" sz="1000"/>
+          </a:p>
+          <a:p>
+            <a:r>
+              <a:rPr lang="zh-CN" altLang="en-US" sz="1000"/>
+              <a:t>拟</a:t>
+            </a:r>
+            <a:r>
+              <a:rPr lang="zh-CN" altLang="en-US" sz="1000"/>
+              <a:t>电流</a:t>
+            </a:r>
+            <a:endParaRPr lang="zh-CN" altLang="en-US" sz="1000"/>
+          </a:p>
+        </p:txBody>
+      </p:sp>
+      <p:sp>
+        <p:nvSpPr>
+          <p:cNvPr id="25" name="文本框 24"/>
+          <p:cNvSpPr txBox="1"/>
+          <p:nvPr/>
+        </p:nvSpPr>
+        <p:spPr>
+          <a:xfrm>
+            <a:off x="3028315" y="816610"/>
+            <a:ext cx="6296660" cy="579120"/>
+          </a:xfrm>
+          <a:prstGeom prst="rect">
+            <a:avLst/>
+          </a:prstGeom>
+          <a:noFill/>
+        </p:spPr>
+        <p:txBody>
+          <a:bodyPr wrap="square" rtlCol="0">
+            <a:noAutofit/>
+          </a:bodyPr>
+          <a:p>
+            <a:r>
+              <a:rPr lang="en-US" altLang="zh-CN"/>
+              <a:t>                                 </a:t>
+            </a:r>
+            <a:r>
+              <a:rPr lang="en-US" altLang="zh-CN">
+                <a:ln/>
+                <a:solidFill>
+                  <a:schemeClr val="tx1"/>
+                </a:solidFill>
+                <a:effectLst>
+                  <a:outerShdw blurRad="38100" dist="19050" dir="2700000" algn="tl" rotWithShape="0">
+                    <a:schemeClr val="dk1">
+                      <a:alpha val="40000"/>
+                    </a:schemeClr>
+                  </a:outerShdw>
+                </a:effectLst>
+              </a:rPr>
+              <a:t> </a:t>
+            </a:r>
+            <a:r>
+              <a:rPr lang="zh-CN" altLang="en-US" sz="2400">
+                <a:ln/>
+                <a:solidFill>
+                  <a:schemeClr val="tx1"/>
+                </a:solidFill>
+                <a:effectLst>
+                  <a:outerShdw blurRad="38100" dist="19050" dir="2700000" algn="tl" rotWithShape="0">
+                    <a:schemeClr val="dk1">
+                      <a:alpha val="40000"/>
+                    </a:schemeClr>
+                  </a:outerShdw>
+                </a:effectLst>
+              </a:rPr>
+              <a:t>气流控制模块</a:t>
+            </a:r>
+            <a:r>
+              <a:rPr lang="en-US" altLang="zh-CN" sz="2400">
+                <a:ln/>
+                <a:solidFill>
+                  <a:schemeClr val="tx1"/>
+                </a:solidFill>
+                <a:effectLst>
+                  <a:outerShdw blurRad="38100" dist="19050" dir="2700000" algn="tl" rotWithShape="0">
+                    <a:schemeClr val="dk1">
+                      <a:alpha val="40000"/>
+                    </a:schemeClr>
+                  </a:outerShdw>
+                </a:effectLst>
+              </a:rPr>
+              <a:t> </a:t>
+            </a:r>
+            <a:endParaRPr lang="en-US" altLang="zh-CN" sz="2400">
+              <a:ln/>
+              <a:solidFill>
+                <a:schemeClr val="tx1"/>
+              </a:solidFill>
+              <a:effectLst>
+                <a:outerShdw blurRad="38100" dist="19050" dir="2700000" algn="tl" rotWithShape="0">
+                  <a:schemeClr val="dk1">
+                    <a:alpha val="40000"/>
+                  </a:schemeClr>
+                </a:outerShdw>
+              </a:effectLst>
+            </a:endParaRPr>
+          </a:p>
+        </p:txBody>
+      </p:sp>
+    </p:spTree>
+    <p:custDataLst>
+      <p:tags r:id="rId1"/>
+    </p:custDataLst>
+  </p:cSld>
+  <p:clrMapOvr>
+    <a:masterClrMapping/>
+  </p:clrMapOvr>
+</p:sld>
+</file>
+
+<file path=ppt/slides/slide4.xml><?xml version="1.0" encoding="utf-8"?>
+<p:sld xmlns:a="http://schemas.openxmlformats.org/drawingml/2006/main" xmlns:r="http://schemas.openxmlformats.org/officeDocument/2006/relationships" xmlns:p="http://schemas.openxmlformats.org/presentationml/2006/main">
+  <p:cSld>
+    <p:bg>
+      <p:bgPr>
+        <a:solidFill>
+          <a:schemeClr val="accent1">
+            <a:lumMod val="20000"/>
+            <a:lumOff val="80000"/>
+          </a:schemeClr>
+        </a:solidFill>
+        <a:effectLst/>
+      </p:bgPr>
+    </p:bg>
+    <p:spTree>
+      <p:nvGrpSpPr>
+        <p:cNvPr id="1" name=""/>
+        <p:cNvGrpSpPr/>
+        <p:nvPr/>
+      </p:nvGrpSpPr>
+      <p:grpSpPr/>
+      <p:sp>
+        <p:nvSpPr>
+          <p:cNvPr id="25" name="文本框 24"/>
+          <p:cNvSpPr txBox="1"/>
+          <p:nvPr/>
+        </p:nvSpPr>
+        <p:spPr>
+          <a:xfrm>
+            <a:off x="3028315" y="237490"/>
+            <a:ext cx="6296660" cy="579120"/>
+          </a:xfrm>
+          <a:prstGeom prst="rect">
+            <a:avLst/>
+          </a:prstGeom>
+          <a:noFill/>
+        </p:spPr>
+        <p:txBody>
+          <a:bodyPr wrap="square" rtlCol="0">
+            <a:noAutofit/>
+          </a:bodyPr>
+          <a:p>
+            <a:r>
+              <a:rPr lang="en-US" altLang="zh-CN"/>
+              <a:t>                             </a:t>
+            </a:r>
+            <a:r>
+              <a:rPr lang="en-US" altLang="zh-CN">
+                <a:solidFill>
+                  <a:schemeClr val="tx1"/>
+                </a:solidFill>
+                <a:effectLst>
+                  <a:outerShdw blurRad="38100" dist="19050" dir="2700000" algn="tl" rotWithShape="0">
+                    <a:schemeClr val="dk1">
+                      <a:alpha val="40000"/>
+                    </a:schemeClr>
+                  </a:outerShdw>
+                </a:effectLst>
+              </a:rPr>
+              <a:t> </a:t>
+            </a:r>
+            <a:r>
+              <a:rPr lang="zh-CN" altLang="en-US">
+                <a:solidFill>
+                  <a:schemeClr val="tx1"/>
+                </a:solidFill>
+                <a:effectLst>
+                  <a:outerShdw blurRad="38100" dist="19050" dir="2700000" algn="tl" rotWithShape="0">
+                    <a:schemeClr val="dk1">
+                      <a:alpha val="40000"/>
+                    </a:schemeClr>
+                  </a:outerShdw>
+                </a:effectLst>
+              </a:rPr>
+              <a:t>通讯模块图解</a:t>
+            </a:r>
+            <a:r>
+              <a:rPr lang="en-US" altLang="zh-CN" sz="2400">
+                <a:solidFill>
+                  <a:schemeClr val="tx1"/>
+                </a:solidFill>
+                <a:effectLst>
+                  <a:outerShdw blurRad="38100" dist="19050" dir="2700000" algn="tl" rotWithShape="0">
+                    <a:schemeClr val="dk1">
+                      <a:alpha val="40000"/>
+                    </a:schemeClr>
+                  </a:outerShdw>
+                </a:effectLst>
+              </a:rPr>
+              <a:t> </a:t>
+            </a:r>
+            <a:endParaRPr lang="en-US" altLang="zh-CN" sz="2400">
+              <a:solidFill>
+                <a:schemeClr val="tx1"/>
+              </a:solidFill>
+              <a:effectLst>
+                <a:outerShdw blurRad="38100" dist="19050" dir="2700000" algn="tl" rotWithShape="0">
+                  <a:schemeClr val="dk1">
+                    <a:alpha val="40000"/>
+                  </a:schemeClr>
+                </a:outerShdw>
+              </a:effectLst>
+            </a:endParaRPr>
+          </a:p>
+        </p:txBody>
+      </p:sp>
+      <p:sp>
+        <p:nvSpPr>
+          <p:cNvPr id="16" name="文本框 15"/>
+          <p:cNvSpPr txBox="1"/>
+          <p:nvPr/>
+        </p:nvSpPr>
+        <p:spPr>
+          <a:xfrm>
+            <a:off x="467360" y="5506720"/>
+            <a:ext cx="4344670" cy="955040"/>
+          </a:xfrm>
+          <a:prstGeom prst="rect">
+            <a:avLst/>
+          </a:prstGeom>
+          <a:solidFill>
+            <a:schemeClr val="accent6">
+              <a:lumMod val="40000"/>
+              <a:lumOff val="60000"/>
+            </a:schemeClr>
+          </a:solidFill>
+          <a:ln>
+            <a:noFill/>
+          </a:ln>
+        </p:spPr>
+        <p:txBody>
+          <a:bodyPr wrap="square" rtlCol="0">
+            <a:noAutofit/>
+          </a:bodyPr>
+          <a:p>
+            <a:r>
+              <a:rPr lang="en-US" altLang="zh-CN"/>
+              <a:t>                    IEquipDriver</a:t>
+            </a:r>
+            <a:endParaRPr lang="en-US" altLang="zh-CN"/>
+          </a:p>
+          <a:p>
+            <a:r>
+              <a:rPr lang="en-US" altLang="zh-CN"/>
+              <a:t>  </a:t>
+            </a:r>
+            <a:r>
+              <a:rPr lang="zh-CN" altLang="en-US"/>
+              <a:t>通讯基类接口定义方法</a:t>
+            </a:r>
+            <a:r>
+              <a:rPr lang="en-US" altLang="zh-CN"/>
+              <a:t>Init</a:t>
+            </a:r>
+            <a:r>
+              <a:rPr lang="zh-CN" altLang="en-US"/>
+              <a:t>，</a:t>
+            </a:r>
+            <a:r>
+              <a:rPr lang="en-US" altLang="zh-CN"/>
+              <a:t>Close</a:t>
+            </a:r>
+            <a:r>
+              <a:rPr lang="zh-CN" altLang="en-US"/>
+              <a:t>，</a:t>
+            </a:r>
+            <a:r>
+              <a:rPr lang="en-US" altLang="zh-CN"/>
+              <a:t>IsOnline</a:t>
+            </a:r>
+            <a:r>
+              <a:rPr lang="zh-CN" altLang="en-US"/>
+              <a:t>，</a:t>
+            </a:r>
+            <a:r>
+              <a:rPr lang="en-US" altLang="zh-CN"/>
+              <a:t>SendString</a:t>
+            </a:r>
+            <a:r>
+              <a:rPr lang="zh-CN" altLang="en-US"/>
+              <a:t>，</a:t>
+            </a:r>
+            <a:r>
+              <a:rPr lang="en-US" altLang="zh-CN"/>
+              <a:t>SendByte</a:t>
+            </a:r>
+            <a:endParaRPr lang="en-US" altLang="zh-CN"/>
+          </a:p>
+          <a:p>
+            <a:r>
+              <a:rPr lang="en-US" altLang="zh-CN" sz="1200">
+                <a:sym typeface="+mn-ea"/>
+              </a:rPr>
+              <a:t>                </a:t>
+            </a:r>
+            <a:endParaRPr lang="en-US" altLang="zh-CN" sz="1200">
+              <a:sym typeface="+mn-ea"/>
+            </a:endParaRPr>
+          </a:p>
+        </p:txBody>
+      </p:sp>
+      <p:sp>
+        <p:nvSpPr>
+          <p:cNvPr id="14" name="矩形 13"/>
+          <p:cNvSpPr/>
+          <p:nvPr/>
+        </p:nvSpPr>
+        <p:spPr>
+          <a:xfrm>
+            <a:off x="405765" y="3540760"/>
+            <a:ext cx="4469765" cy="1363345"/>
+          </a:xfrm>
+          <a:prstGeom prst="rect">
+            <a:avLst/>
+          </a:prstGeom>
+          <a:solidFill>
+            <a:schemeClr val="bg1">
+              <a:lumMod val="95000"/>
+            </a:schemeClr>
+          </a:solidFill>
+          <a:ln>
+            <a:noFill/>
+          </a:ln>
+        </p:spPr>
+        <p:style>
+          <a:lnRef idx="2">
+            <a:schemeClr val="accent1">
+              <a:lumMod val="75000"/>
+            </a:schemeClr>
+          </a:lnRef>
+          <a:fillRef idx="1">
+            <a:schemeClr val="accent1"/>
+          </a:fillRef>
+          <a:effectRef idx="0">
+            <a:srgbClr val="FFFFFF"/>
+          </a:effectRef>
+          <a:fontRef idx="minor">
+            <a:schemeClr val="lt1"/>
+          </a:fontRef>
+        </p:style>
+        <p:txBody>
+          <a:bodyPr rtlCol="0" anchor="ctr"/>
+          <a:p>
+            <a:pPr algn="ctr"/>
+            <a:endParaRPr lang="zh-CN" altLang="en-US"/>
+          </a:p>
+        </p:txBody>
+      </p:sp>
+      <p:sp>
+        <p:nvSpPr>
+          <p:cNvPr id="4" name="文本框 3"/>
+          <p:cNvSpPr txBox="1"/>
+          <p:nvPr/>
+        </p:nvSpPr>
+        <p:spPr>
+          <a:xfrm>
+            <a:off x="610235" y="3641090"/>
+            <a:ext cx="4202430" cy="490220"/>
+          </a:xfrm>
+          <a:prstGeom prst="rect">
+            <a:avLst/>
+          </a:prstGeom>
+          <a:solidFill>
+            <a:schemeClr val="accent6">
+              <a:lumMod val="40000"/>
+              <a:lumOff val="60000"/>
+            </a:schemeClr>
+          </a:solidFill>
+          <a:ln>
+            <a:noFill/>
+          </a:ln>
+        </p:spPr>
+        <p:txBody>
+          <a:bodyPr wrap="square" rtlCol="0">
+            <a:noAutofit/>
+          </a:bodyPr>
+          <a:p>
+            <a:r>
+              <a:rPr lang="en-US" altLang="zh-CN" sz="2000"/>
+              <a:t>EquipDriver</a:t>
+            </a:r>
+            <a:r>
+              <a:rPr lang="zh-CN" altLang="en-US" sz="2000"/>
+              <a:t>通讯模块负责命令发送</a:t>
+            </a:r>
+            <a:endParaRPr lang="zh-CN" altLang="en-US" sz="2000"/>
+          </a:p>
+        </p:txBody>
+      </p:sp>
+      <p:sp>
+        <p:nvSpPr>
+          <p:cNvPr id="5" name="文本框 4"/>
+          <p:cNvSpPr txBox="1"/>
+          <p:nvPr/>
+        </p:nvSpPr>
+        <p:spPr>
+          <a:xfrm>
+            <a:off x="1068705" y="4278630"/>
+            <a:ext cx="659765" cy="444500"/>
+          </a:xfrm>
+          <a:prstGeom prst="rect">
+            <a:avLst/>
+          </a:prstGeom>
+          <a:solidFill>
+            <a:schemeClr val="accent5">
+              <a:lumMod val="40000"/>
+              <a:lumOff val="60000"/>
+            </a:schemeClr>
+          </a:solidFill>
+          <a:ln>
+            <a:noFill/>
+          </a:ln>
+        </p:spPr>
+        <p:txBody>
+          <a:bodyPr wrap="square" rtlCol="0">
+            <a:noAutofit/>
+          </a:bodyPr>
+          <a:p>
+            <a:r>
+              <a:rPr lang="zh-CN" altLang="en-US"/>
+              <a:t>串口</a:t>
+            </a:r>
+            <a:endParaRPr lang="zh-CN" altLang="en-US"/>
+          </a:p>
+        </p:txBody>
+      </p:sp>
+      <p:sp>
+        <p:nvSpPr>
+          <p:cNvPr id="17" name="文本框 16"/>
+          <p:cNvSpPr txBox="1"/>
+          <p:nvPr/>
+        </p:nvSpPr>
+        <p:spPr>
+          <a:xfrm>
+            <a:off x="2275840" y="4278630"/>
+            <a:ext cx="805180" cy="444500"/>
+          </a:xfrm>
+          <a:prstGeom prst="rect">
+            <a:avLst/>
+          </a:prstGeom>
+          <a:solidFill>
+            <a:schemeClr val="accent5">
+              <a:lumMod val="40000"/>
+              <a:lumOff val="60000"/>
+            </a:schemeClr>
+          </a:solidFill>
+          <a:ln>
+            <a:noFill/>
+          </a:ln>
+        </p:spPr>
+        <p:txBody>
+          <a:bodyPr wrap="square" rtlCol="0">
+            <a:noAutofit/>
+          </a:bodyPr>
+          <a:p>
+            <a:r>
+              <a:rPr lang="en-US" altLang="zh-CN"/>
+              <a:t>TCP</a:t>
+            </a:r>
+            <a:endParaRPr lang="en-US" altLang="zh-CN"/>
+          </a:p>
+        </p:txBody>
+      </p:sp>
+      <p:sp>
+        <p:nvSpPr>
+          <p:cNvPr id="18" name="文本框 17"/>
+          <p:cNvSpPr txBox="1"/>
+          <p:nvPr/>
+        </p:nvSpPr>
+        <p:spPr>
+          <a:xfrm>
+            <a:off x="3639185" y="4278630"/>
+            <a:ext cx="742315" cy="444500"/>
+          </a:xfrm>
+          <a:prstGeom prst="rect">
+            <a:avLst/>
+          </a:prstGeom>
+          <a:solidFill>
+            <a:schemeClr val="accent5">
+              <a:lumMod val="40000"/>
+              <a:lumOff val="60000"/>
+            </a:schemeClr>
+          </a:solidFill>
+          <a:ln>
+            <a:noFill/>
+          </a:ln>
+        </p:spPr>
+        <p:txBody>
+          <a:bodyPr wrap="square" rtlCol="0">
+            <a:noAutofit/>
+          </a:bodyPr>
+          <a:p>
+            <a:r>
+              <a:rPr lang="en-US" altLang="zh-CN"/>
+              <a:t>UDP</a:t>
+            </a:r>
+            <a:endParaRPr lang="en-US" altLang="zh-CN"/>
+          </a:p>
+        </p:txBody>
+      </p:sp>
+      <p:sp>
+        <p:nvSpPr>
+          <p:cNvPr id="6" name="矩形 5"/>
+          <p:cNvSpPr/>
+          <p:nvPr/>
+        </p:nvSpPr>
+        <p:spPr>
+          <a:xfrm>
+            <a:off x="6753225" y="3540760"/>
+            <a:ext cx="4469765" cy="1363345"/>
+          </a:xfrm>
+          <a:prstGeom prst="rect">
+            <a:avLst/>
+          </a:prstGeom>
+          <a:solidFill>
+            <a:schemeClr val="bg1">
+              <a:lumMod val="95000"/>
+            </a:schemeClr>
+          </a:solidFill>
+          <a:ln>
+            <a:noFill/>
+          </a:ln>
+        </p:spPr>
+        <p:style>
+          <a:lnRef idx="2">
+            <a:schemeClr val="accent1">
+              <a:lumMod val="75000"/>
+            </a:schemeClr>
+          </a:lnRef>
+          <a:fillRef idx="1">
+            <a:schemeClr val="accent1"/>
+          </a:fillRef>
+          <a:effectRef idx="0">
+            <a:srgbClr val="FFFFFF"/>
+          </a:effectRef>
+          <a:fontRef idx="minor">
+            <a:schemeClr val="lt1"/>
+          </a:fontRef>
+        </p:style>
+        <p:txBody>
+          <a:bodyPr rtlCol="0" anchor="ctr"/>
+          <a:p>
+            <a:pPr algn="ctr"/>
+            <a:endParaRPr lang="zh-CN" altLang="en-US"/>
+          </a:p>
+        </p:txBody>
+      </p:sp>
+      <p:sp>
+        <p:nvSpPr>
+          <p:cNvPr id="7" name="文本框 6"/>
+          <p:cNvSpPr txBox="1"/>
+          <p:nvPr/>
+        </p:nvSpPr>
+        <p:spPr>
+          <a:xfrm>
+            <a:off x="6957695" y="3641090"/>
+            <a:ext cx="4202430" cy="1176655"/>
+          </a:xfrm>
+          <a:prstGeom prst="rect">
+            <a:avLst/>
+          </a:prstGeom>
+          <a:solidFill>
+            <a:schemeClr val="accent6">
+              <a:lumMod val="40000"/>
+              <a:lumOff val="60000"/>
+            </a:schemeClr>
+          </a:solidFill>
+          <a:ln>
+            <a:noFill/>
+          </a:ln>
+        </p:spPr>
+        <p:txBody>
+          <a:bodyPr wrap="square" rtlCol="0">
+            <a:noAutofit/>
+          </a:bodyPr>
+          <a:p>
+            <a:r>
+              <a:rPr lang="en-US" altLang="zh-CN" sz="2000"/>
+              <a:t>EquipInfo </a:t>
+            </a:r>
+            <a:r>
+              <a:rPr lang="zh-CN" altLang="en-US" sz="1600"/>
+              <a:t>有</a:t>
+            </a:r>
+            <a:r>
+              <a:rPr lang="en-US" altLang="zh-CN" sz="1600"/>
+              <a:t>mainQueue</a:t>
+            </a:r>
+            <a:r>
+              <a:rPr lang="zh-CN" altLang="en-US" sz="1600"/>
+              <a:t>主命令队列</a:t>
+            </a:r>
+            <a:endParaRPr lang="zh-CN" altLang="en-US" sz="1600"/>
+          </a:p>
+          <a:p>
+            <a:r>
+              <a:rPr lang="en-US" altLang="zh-CN" sz="1600"/>
+              <a:t>secondaryQueue</a:t>
+            </a:r>
+            <a:r>
+              <a:rPr lang="zh-CN" altLang="en-US" sz="1600"/>
+              <a:t> 次命令队列</a:t>
+            </a:r>
+            <a:r>
+              <a:rPr lang="en-US" altLang="zh-CN" sz="1600"/>
+              <a:t>,</a:t>
+            </a:r>
+            <a:r>
+              <a:rPr lang="zh-CN" altLang="en-US" sz="1600"/>
+              <a:t>负责命令缓存</a:t>
+            </a:r>
+            <a:r>
+              <a:rPr lang="en-US" altLang="zh-CN" sz="1600"/>
+              <a:t>,</a:t>
+            </a:r>
+            <a:r>
+              <a:rPr lang="zh-CN" altLang="en-US" sz="1600"/>
+              <a:t>循环命令的入队列，以及命令发送间隔等</a:t>
+            </a:r>
+            <a:r>
+              <a:rPr lang="en-US" altLang="zh-CN" sz="2000"/>
+              <a:t> </a:t>
+            </a:r>
+            <a:endParaRPr lang="en-US" altLang="zh-CN" sz="2000"/>
+          </a:p>
+        </p:txBody>
+      </p:sp>
+      <p:sp>
+        <p:nvSpPr>
+          <p:cNvPr id="11" name="矩形 10"/>
+          <p:cNvSpPr/>
+          <p:nvPr/>
+        </p:nvSpPr>
+        <p:spPr>
+          <a:xfrm>
+            <a:off x="1856740" y="2395220"/>
+            <a:ext cx="8101965" cy="619760"/>
+          </a:xfrm>
+          <a:prstGeom prst="rect">
+            <a:avLst/>
+          </a:prstGeom>
+          <a:solidFill>
+            <a:schemeClr val="bg1">
+              <a:lumMod val="95000"/>
+            </a:schemeClr>
+          </a:solidFill>
+          <a:ln>
+            <a:noFill/>
+          </a:ln>
+        </p:spPr>
+        <p:style>
+          <a:lnRef idx="2">
+            <a:schemeClr val="accent1">
+              <a:lumMod val="75000"/>
+            </a:schemeClr>
+          </a:lnRef>
+          <a:fillRef idx="1">
+            <a:schemeClr val="accent1"/>
+          </a:fillRef>
+          <a:effectRef idx="0">
+            <a:srgbClr val="FFFFFF"/>
+          </a:effectRef>
+          <a:fontRef idx="minor">
+            <a:schemeClr val="lt1"/>
+          </a:fontRef>
+        </p:style>
+        <p:txBody>
+          <a:bodyPr rtlCol="0" anchor="ctr"/>
+          <a:p>
+            <a:pPr algn="ctr"/>
+            <a:endParaRPr lang="zh-CN" altLang="en-US"/>
+          </a:p>
+        </p:txBody>
+      </p:sp>
+      <p:sp>
+        <p:nvSpPr>
+          <p:cNvPr id="12" name="文本框 11"/>
+          <p:cNvSpPr txBox="1"/>
+          <p:nvPr/>
+        </p:nvSpPr>
+        <p:spPr>
+          <a:xfrm>
+            <a:off x="1994535" y="2501265"/>
+            <a:ext cx="7825740" cy="436880"/>
+          </a:xfrm>
+          <a:prstGeom prst="rect">
+            <a:avLst/>
+          </a:prstGeom>
+          <a:solidFill>
+            <a:schemeClr val="accent6">
+              <a:lumMod val="40000"/>
+              <a:lumOff val="60000"/>
+            </a:schemeClr>
+          </a:solidFill>
+          <a:ln>
+            <a:noFill/>
+          </a:ln>
+        </p:spPr>
+        <p:txBody>
+          <a:bodyPr wrap="square" rtlCol="0">
+            <a:noAutofit/>
+          </a:bodyPr>
+          <a:p>
+            <a:r>
+              <a:rPr lang="en-US" altLang="zh-CN" sz="2000"/>
+              <a:t>Equipment</a:t>
+            </a:r>
+            <a:r>
+              <a:rPr lang="en-US" altLang="zh-CN"/>
+              <a:t> </a:t>
+            </a:r>
+            <a:r>
+              <a:rPr lang="zh-CN" altLang="en-US"/>
+              <a:t>代码一个完整的串口，持有一个命令发送器与待发送命令队列</a:t>
+            </a:r>
+            <a:r>
+              <a:rPr lang="en-US" altLang="zh-CN"/>
+              <a:t> </a:t>
+            </a:r>
+            <a:endParaRPr lang="en-US" altLang="zh-CN"/>
+          </a:p>
+        </p:txBody>
+      </p:sp>
+      <p:sp>
+        <p:nvSpPr>
+          <p:cNvPr id="13" name="矩形 12"/>
+          <p:cNvSpPr/>
+          <p:nvPr/>
+        </p:nvSpPr>
+        <p:spPr>
+          <a:xfrm>
+            <a:off x="3883660" y="816610"/>
+            <a:ext cx="4047490" cy="1052830"/>
+          </a:xfrm>
+          <a:prstGeom prst="rect">
+            <a:avLst/>
+          </a:prstGeom>
+          <a:solidFill>
+            <a:schemeClr val="bg1">
+              <a:lumMod val="95000"/>
+            </a:schemeClr>
+          </a:solidFill>
+          <a:ln>
+            <a:noFill/>
+          </a:ln>
+        </p:spPr>
+        <p:style>
+          <a:lnRef idx="2">
+            <a:schemeClr val="accent1">
+              <a:lumMod val="75000"/>
+            </a:schemeClr>
+          </a:lnRef>
+          <a:fillRef idx="1">
+            <a:schemeClr val="accent1"/>
+          </a:fillRef>
+          <a:effectRef idx="0">
+            <a:srgbClr val="FFFFFF"/>
+          </a:effectRef>
+          <a:fontRef idx="minor">
+            <a:schemeClr val="lt1"/>
+          </a:fontRef>
+        </p:style>
+        <p:txBody>
+          <a:bodyPr rtlCol="0" anchor="ctr"/>
+          <a:p>
+            <a:pPr algn="ctr"/>
+            <a:endParaRPr lang="zh-CN" altLang="en-US"/>
+          </a:p>
+        </p:txBody>
+      </p:sp>
+      <p:sp>
+        <p:nvSpPr>
+          <p:cNvPr id="19" name="文本框 18"/>
+          <p:cNvSpPr txBox="1"/>
+          <p:nvPr/>
+        </p:nvSpPr>
+        <p:spPr>
+          <a:xfrm>
+            <a:off x="4109720" y="930910"/>
+            <a:ext cx="3538855" cy="838200"/>
+          </a:xfrm>
+          <a:prstGeom prst="rect">
+            <a:avLst/>
+          </a:prstGeom>
+          <a:solidFill>
+            <a:schemeClr val="accent6">
+              <a:lumMod val="40000"/>
+              <a:lumOff val="60000"/>
+            </a:schemeClr>
+          </a:solidFill>
+          <a:ln>
+            <a:noFill/>
+          </a:ln>
+        </p:spPr>
+        <p:txBody>
+          <a:bodyPr wrap="square" rtlCol="0">
+            <a:noAutofit/>
+          </a:bodyPr>
+          <a:p>
+            <a:r>
+              <a:rPr lang="en-US" altLang="zh-CN"/>
+              <a:t>EquipmentManager </a:t>
+            </a:r>
+            <a:r>
+              <a:rPr lang="zh-CN" altLang="en-US"/>
+              <a:t>管理整</a:t>
+            </a:r>
+            <a:endParaRPr lang="zh-CN" altLang="en-US"/>
+          </a:p>
+          <a:p>
+            <a:r>
+              <a:rPr lang="zh-CN" altLang="en-US"/>
+              <a:t>个上位机设备所有发送</a:t>
+            </a:r>
+            <a:r>
+              <a:rPr lang="zh-CN" altLang="en-US"/>
+              <a:t>串口</a:t>
+            </a:r>
+            <a:endParaRPr lang="zh-CN" altLang="en-US"/>
+          </a:p>
+        </p:txBody>
+      </p:sp>
+      <p:sp>
+        <p:nvSpPr>
+          <p:cNvPr id="20" name="下箭头 19"/>
+          <p:cNvSpPr/>
+          <p:nvPr/>
+        </p:nvSpPr>
+        <p:spPr>
+          <a:xfrm>
+            <a:off x="2357120" y="4899660"/>
+            <a:ext cx="182245" cy="574675"/>
+          </a:xfrm>
+          <a:prstGeom prst="downArrow">
+            <a:avLst/>
+          </a:prstGeom>
+        </p:spPr>
+        <p:style>
+          <a:lnRef idx="2">
+            <a:schemeClr val="accent1">
+              <a:lumMod val="75000"/>
+            </a:schemeClr>
+          </a:lnRef>
+          <a:fillRef idx="1">
+            <a:schemeClr val="accent1"/>
+          </a:fillRef>
+          <a:effectRef idx="0">
+            <a:srgbClr val="FFFFFF"/>
+          </a:effectRef>
+          <a:fontRef idx="minor">
+            <a:schemeClr val="lt1"/>
+          </a:fontRef>
+        </p:style>
+        <p:txBody>
+          <a:bodyPr rtlCol="0" anchor="ctr"/>
+          <a:p>
+            <a:pPr algn="ctr"/>
+            <a:endParaRPr lang="zh-CN" altLang="en-US"/>
+          </a:p>
+        </p:txBody>
+      </p:sp>
+      <p:sp>
+        <p:nvSpPr>
+          <p:cNvPr id="22" name="下箭头 21"/>
+          <p:cNvSpPr/>
+          <p:nvPr/>
+        </p:nvSpPr>
+        <p:spPr>
+          <a:xfrm>
+            <a:off x="3152775" y="3011170"/>
+            <a:ext cx="162560" cy="517525"/>
+          </a:xfrm>
+          <a:prstGeom prst="downArrow">
+            <a:avLst/>
+          </a:prstGeom>
+        </p:spPr>
+        <p:style>
+          <a:lnRef idx="2">
+            <a:schemeClr val="accent1">
+              <a:lumMod val="75000"/>
+            </a:schemeClr>
+          </a:lnRef>
+          <a:fillRef idx="1">
+            <a:schemeClr val="accent1"/>
+          </a:fillRef>
+          <a:effectRef idx="0">
+            <a:srgbClr val="FFFFFF"/>
+          </a:effectRef>
+          <a:fontRef idx="minor">
+            <a:schemeClr val="lt1"/>
+          </a:fontRef>
+        </p:style>
+        <p:txBody>
+          <a:bodyPr rtlCol="0" anchor="ctr"/>
+          <a:p>
+            <a:pPr algn="ctr"/>
+            <a:endParaRPr lang="zh-CN" altLang="en-US"/>
+          </a:p>
+        </p:txBody>
+      </p:sp>
+      <p:sp>
+        <p:nvSpPr>
+          <p:cNvPr id="23" name="下箭头 22"/>
+          <p:cNvSpPr/>
+          <p:nvPr/>
+        </p:nvSpPr>
+        <p:spPr>
+          <a:xfrm>
+            <a:off x="7916545" y="3030220"/>
+            <a:ext cx="133985" cy="479425"/>
+          </a:xfrm>
+          <a:prstGeom prst="downArrow">
+            <a:avLst/>
+          </a:prstGeom>
+        </p:spPr>
+        <p:style>
+          <a:lnRef idx="2">
+            <a:schemeClr val="accent1">
+              <a:lumMod val="75000"/>
+            </a:schemeClr>
+          </a:lnRef>
+          <a:fillRef idx="1">
+            <a:schemeClr val="accent1"/>
+          </a:fillRef>
+          <a:effectRef idx="0">
+            <a:srgbClr val="FFFFFF"/>
+          </a:effectRef>
+          <a:fontRef idx="minor">
+            <a:schemeClr val="lt1"/>
+          </a:fontRef>
+        </p:style>
+        <p:txBody>
+          <a:bodyPr rtlCol="0" anchor="ctr"/>
+          <a:p>
+            <a:pPr algn="ctr"/>
+            <a:endParaRPr lang="zh-CN" altLang="en-US"/>
+          </a:p>
+        </p:txBody>
+      </p:sp>
+      <p:sp>
+        <p:nvSpPr>
+          <p:cNvPr id="24" name="下箭头 23"/>
+          <p:cNvSpPr/>
+          <p:nvPr/>
+        </p:nvSpPr>
+        <p:spPr>
+          <a:xfrm>
+            <a:off x="5759450" y="1880235"/>
+            <a:ext cx="144145" cy="498475"/>
+          </a:xfrm>
+          <a:prstGeom prst="downArrow">
+            <a:avLst/>
+          </a:prstGeom>
         </p:spPr>
         <p:style>
           <a:lnRef idx="2">
@@ -5556,6 +8604,30 @@
 </p:tagLst>
 </file>
 
+<file path=ppt/tags/tag64.xml><?xml version="1.0" encoding="utf-8"?>
+<p:tagLst xmlns:p="http://schemas.openxmlformats.org/presentationml/2006/main">
+  <p:tag name="KSO_WM_BEAUTIFY_FLAG" val="#wm#"/>
+  <p:tag name="KSO_WM_TEMPLATE_CATEGORY" val="custom"/>
+  <p:tag name="KSO_WM_TEMPLATE_INDEX" val="20205081"/>
+</p:tagLst>
+</file>
+
+<file path=ppt/tags/tag65.xml><?xml version="1.0" encoding="utf-8"?>
+<p:tagLst xmlns:p="http://schemas.openxmlformats.org/presentationml/2006/main">
+  <p:tag name="KSO_WM_BEAUTIFY_FLAG" val="#wm#"/>
+  <p:tag name="KSO_WM_TEMPLATE_CATEGORY" val="custom"/>
+  <p:tag name="KSO_WM_TEMPLATE_INDEX" val="20205081"/>
+</p:tagLst>
+</file>
+
+<file path=ppt/tags/tag66.xml><?xml version="1.0" encoding="utf-8"?>
+<p:tagLst xmlns:p="http://schemas.openxmlformats.org/presentationml/2006/main">
+  <p:tag name="KSO_WM_BEAUTIFY_FLAG" val="#wm#"/>
+  <p:tag name="KSO_WM_TEMPLATE_CATEGORY" val="custom"/>
+  <p:tag name="KSO_WM_TEMPLATE_INDEX" val="20205081"/>
+</p:tagLst>
+</file>
+
 <file path=ppt/tags/tag7.xml><?xml version="1.0" encoding="utf-8"?>
 <p:tagLst xmlns:p="http://schemas.openxmlformats.org/presentationml/2006/main">
   <p:tag name="KSO_WM_UNIT_HIGHLIGHT" val="0"/>
